--- a/myhydra/double_pdf/presentazione_double_pdf.pptx
+++ b/myhydra/double_pdf/presentazione_double_pdf.pptx
@@ -14,6 +14,7 @@
     <p:sldId id="262" r:id="rId13"/>
     <p:sldId id="263" r:id="rId14"/>
     <p:sldId id="264" r:id="rId15"/>
+    <p:sldId id="265" r:id="rId16"/>
   </p:sldIdLst>
   <p:sldSz cx="12191695" cy="6858000" type="screen4x3"/>
   <p:notesSz cx="6858000" cy="9144000"/>
@@ -3092,7 +3093,7 @@
     <p:bg>
       <p:bgPr>
         <a:solidFill>
-          <a:srgbClr val="1B2A4A"/>
+          <a:srgbClr val="142B4D"/>
         </a:solidFill>
         <a:effectLst/>
       </p:bgPr>
@@ -3112,8 +3113,37 @@
         </p:nvSpPr>
         <p:spPr>
           <a:xfrm>
-            <a:off x="731520" y="1097280"/>
-            <a:ext cx="10698480" cy="4572000"/>
+            <a:off x="731520" y="1371600"/>
+            <a:ext cx="1463040" cy="109728"/>
+          </a:xfrm>
+          <a:prstGeom prst="rect">
+            <a:avLst/>
+          </a:prstGeom>
+          <a:solidFill>
+            <a:srgbClr val="E8A82E"/>
+          </a:solidFill>
+          <a:ln>
+            <a:noFill/>
+          </a:ln>
+        </p:spPr>
+        <p:txBody>
+          <a:bodyPr wrap="none">
+            <a:spAutoFit/>
+          </a:bodyPr>
+          <a:lstStyle/>
+          <a:p/>
+        </p:txBody>
+      </p:sp>
+      <p:sp>
+        <p:nvSpPr>
+          <p:cNvPr id="3" name="TextBox 2"/>
+          <p:cNvSpPr txBox="1"/>
+          <p:nvPr/>
+        </p:nvSpPr>
+        <p:spPr>
+          <a:xfrm>
+            <a:off x="731520" y="1737360"/>
+            <a:ext cx="10698480" cy="3291840"/>
           </a:xfrm>
           <a:prstGeom prst="rect">
             <a:avLst/>
@@ -3125,28 +3155,27 @@
             <a:spAutoFit/>
           </a:bodyPr>
           <a:lstStyle/>
-          <a:p/>
-          <a:p>
-            <a:pPr>
-              <a:spcAft>
-                <a:spcPts val="1200"/>
-              </a:spcAft>
-              <a:defRPr sz="4400" b="1">
-                <a:solidFill>
-                  <a:srgbClr val="FFFFFF"/>
-                </a:solidFill>
-              </a:defRPr>
-            </a:pPr>
-            <a:r>
-              <a:t>Double PDF IOL + JOB</a:t>
-            </a:r>
-          </a:p>
           <a:p>
             <a:pPr>
               <a:spcAft>
                 <a:spcPts val="600"/>
               </a:spcAft>
-              <a:defRPr sz="2400" b="0">
+              <a:defRPr sz="5200" b="1" i="0">
+                <a:solidFill>
+                  <a:srgbClr val="FFFFFF"/>
+                </a:solidFill>
+              </a:defRPr>
+            </a:pPr>
+            <a:r>
+              <a:t>DOUBLE PDF IOL + JOB</a:t>
+            </a:r>
+          </a:p>
+          <a:p>
+            <a:pPr>
+              <a:spcAft>
+                <a:spcPts val="400"/>
+              </a:spcAft>
+              <a:defRPr sz="2400" b="0" i="0">
                 <a:solidFill>
                   <a:srgbClr val="BBDDEE"/>
                 </a:solidFill>
@@ -3160,14 +3189,14 @@
       </p:sp>
       <p:sp>
         <p:nvSpPr>
-          <p:cNvPr id="3" name="TextBox 2"/>
+          <p:cNvPr id="4" name="TextBox 3"/>
           <p:cNvSpPr txBox="1"/>
           <p:nvPr/>
         </p:nvSpPr>
         <p:spPr>
           <a:xfrm>
-            <a:off x="731520" y="5852160"/>
-            <a:ext cx="10698480" cy="548640"/>
+            <a:off x="731520" y="5120640"/>
+            <a:ext cx="10698480" cy="914400"/>
           </a:xfrm>
           <a:prstGeom prst="rect">
             <a:avLst/>
@@ -3179,20 +3208,441 @@
             <a:spAutoFit/>
           </a:bodyPr>
           <a:lstStyle/>
-          <a:p/>
           <a:p>
             <a:pPr>
               <a:spcAft>
-                <a:spcPts val="600"/>
+                <a:spcPts val="400"/>
               </a:spcAft>
-              <a:defRPr sz="1400" b="0">
-                <a:solidFill>
-                  <a:srgbClr val="88AACC"/>
-                </a:solidFill>
-              </a:defRPr>
-            </a:pPr>
-            <a:r>
-              <a:t>Menerva MAS  ·  caso 6 JOB.0139.23  ·  ottobre 2026</a:t>
+              <a:defRPr sz="1700" b="0" i="1">
+                <a:solidFill>
+                  <a:srgbClr val="E8A82E"/>
+                </a:solidFill>
+              </a:defRPr>
+            </a:pPr>
+            <a:r>
+              <a:t>VLM che legge  ·  Python che calcola e non inventa mai  ·  ogni dubbio in revisione</a:t>
+            </a:r>
+          </a:p>
+        </p:txBody>
+      </p:sp>
+      <p:sp>
+        <p:nvSpPr>
+          <p:cNvPr id="5" name="TextBox 4"/>
+          <p:cNvSpPr txBox="1"/>
+          <p:nvPr/>
+        </p:nvSpPr>
+        <p:spPr>
+          <a:xfrm>
+            <a:off x="548640" y="6400800"/>
+            <a:ext cx="11064240" cy="274320"/>
+          </a:xfrm>
+          <a:prstGeom prst="rect">
+            <a:avLst/>
+          </a:prstGeom>
+          <a:noFill/>
+        </p:spPr>
+        <p:txBody>
+          <a:bodyPr wrap="square">
+            <a:spAutoFit/>
+          </a:bodyPr>
+          <a:lstStyle/>
+          <a:p>
+            <a:pPr>
+              <a:spcAft>
+                <a:spcPts val="400"/>
+              </a:spcAft>
+              <a:defRPr sz="1100" b="0" i="0">
+                <a:solidFill>
+                  <a:srgbClr val="5A6C7D"/>
+                </a:solidFill>
+              </a:defRPr>
+            </a:pPr>
+            <a:r>
+              <a:t>Menerva MAS  ·  Double PDF IOL+JOB  ·  caso 6 JOB.0139.23</a:t>
+            </a:r>
+          </a:p>
+        </p:txBody>
+      </p:sp>
+      <p:sp>
+        <p:nvSpPr>
+          <p:cNvPr id="6" name="TextBox 5"/>
+          <p:cNvSpPr txBox="1"/>
+          <p:nvPr/>
+        </p:nvSpPr>
+        <p:spPr>
+          <a:xfrm>
+            <a:off x="10972800" y="6400800"/>
+            <a:ext cx="640080" cy="274320"/>
+          </a:xfrm>
+          <a:prstGeom prst="rect">
+            <a:avLst/>
+          </a:prstGeom>
+          <a:noFill/>
+        </p:spPr>
+        <p:txBody>
+          <a:bodyPr wrap="none">
+            <a:spAutoFit/>
+          </a:bodyPr>
+          <a:lstStyle/>
+          <a:p>
+            <a:pPr algn="r">
+              <a:spcAft>
+                <a:spcPts val="400"/>
+              </a:spcAft>
+              <a:defRPr sz="1100" b="0" i="0">
+                <a:solidFill>
+                  <a:srgbClr val="5A6C7D"/>
+                </a:solidFill>
+              </a:defRPr>
+            </a:pPr>
+            <a:r>
+              <a:t>1/10</a:t>
+            </a:r>
+          </a:p>
+        </p:txBody>
+      </p:sp>
+    </p:spTree>
+  </p:cSld>
+  <p:clrMapOvr>
+    <a:masterClrMapping/>
+  </p:clrMapOvr>
+</p:sld>
+</file>
+
+<file path=ppt/slides/slide10.xml><?xml version="1.0" encoding="utf-8"?>
+<p:sld xmlns:a="http://schemas.openxmlformats.org/drawingml/2006/main" xmlns:p="http://schemas.openxmlformats.org/presentationml/2006/main" xmlns:r="http://schemas.openxmlformats.org/officeDocument/2006/relationships">
+  <p:cSld>
+    <p:bg>
+      <p:bgPr>
+        <a:solidFill>
+          <a:srgbClr val="142B4D"/>
+        </a:solidFill>
+        <a:effectLst/>
+      </p:bgPr>
+    </p:bg>
+    <p:spTree>
+      <p:nvGrpSpPr>
+        <p:cNvPr id="1" name=""/>
+        <p:cNvGrpSpPr/>
+        <p:nvPr/>
+      </p:nvGrpSpPr>
+      <p:grpSpPr/>
+      <p:sp>
+        <p:nvSpPr>
+          <p:cNvPr id="2" name="TextBox 1"/>
+          <p:cNvSpPr txBox="1"/>
+          <p:nvPr/>
+        </p:nvSpPr>
+        <p:spPr>
+          <a:xfrm>
+            <a:off x="0" y="0"/>
+            <a:ext cx="12191695" cy="91440"/>
+          </a:xfrm>
+          <a:prstGeom prst="rect">
+            <a:avLst/>
+          </a:prstGeom>
+          <a:solidFill>
+            <a:srgbClr val="E8A82E"/>
+          </a:solidFill>
+          <a:ln>
+            <a:noFill/>
+          </a:ln>
+        </p:spPr>
+        <p:txBody>
+          <a:bodyPr wrap="none">
+            <a:spAutoFit/>
+          </a:bodyPr>
+          <a:lstStyle/>
+          <a:p/>
+        </p:txBody>
+      </p:sp>
+      <p:sp>
+        <p:nvSpPr>
+          <p:cNvPr id="3" name="TextBox 2"/>
+          <p:cNvSpPr txBox="1"/>
+          <p:nvPr/>
+        </p:nvSpPr>
+        <p:spPr>
+          <a:xfrm>
+            <a:off x="640080" y="320040"/>
+            <a:ext cx="10881360" cy="1051560"/>
+          </a:xfrm>
+          <a:prstGeom prst="rect">
+            <a:avLst/>
+          </a:prstGeom>
+          <a:noFill/>
+        </p:spPr>
+        <p:txBody>
+          <a:bodyPr wrap="square">
+            <a:spAutoFit/>
+          </a:bodyPr>
+          <a:lstStyle/>
+          <a:p>
+            <a:pPr>
+              <a:spcAft>
+                <a:spcPts val="100"/>
+              </a:spcAft>
+              <a:defRPr sz="1300" b="1" i="0">
+                <a:solidFill>
+                  <a:srgbClr val="E8A82E"/>
+                </a:solidFill>
+              </a:defRPr>
+            </a:pPr>
+            <a:r>
+              <a:t>09 · GLOSSARIO E PROSSIMI PASSI</a:t>
+            </a:r>
+          </a:p>
+          <a:p>
+            <a:pPr>
+              <a:spcAft>
+                <a:spcPts val="400"/>
+              </a:spcAft>
+              <a:defRPr sz="3000" b="1" i="0">
+                <a:solidFill>
+                  <a:srgbClr val="FFFFFF"/>
+                </a:solidFill>
+              </a:defRPr>
+            </a:pPr>
+            <a:r>
+              <a:t>Parlare la stessa lingua</a:t>
+            </a:r>
+          </a:p>
+        </p:txBody>
+      </p:sp>
+      <p:sp>
+        <p:nvSpPr>
+          <p:cNvPr id="4" name="TextBox 3"/>
+          <p:cNvSpPr txBox="1"/>
+          <p:nvPr/>
+        </p:nvSpPr>
+        <p:spPr>
+          <a:xfrm>
+            <a:off x="548640" y="6400800"/>
+            <a:ext cx="11064240" cy="274320"/>
+          </a:xfrm>
+          <a:prstGeom prst="rect">
+            <a:avLst/>
+          </a:prstGeom>
+          <a:noFill/>
+        </p:spPr>
+        <p:txBody>
+          <a:bodyPr wrap="square">
+            <a:spAutoFit/>
+          </a:bodyPr>
+          <a:lstStyle/>
+          <a:p>
+            <a:pPr>
+              <a:spcAft>
+                <a:spcPts val="400"/>
+              </a:spcAft>
+              <a:defRPr sz="1100" b="0" i="0">
+                <a:solidFill>
+                  <a:srgbClr val="5A6C7D"/>
+                </a:solidFill>
+              </a:defRPr>
+            </a:pPr>
+            <a:r>
+              <a:t>Menerva MAS  ·  Double PDF IOL+JOB  ·  caso 6 JOB.0139.23</a:t>
+            </a:r>
+          </a:p>
+        </p:txBody>
+      </p:sp>
+      <p:sp>
+        <p:nvSpPr>
+          <p:cNvPr id="5" name="TextBox 4"/>
+          <p:cNvSpPr txBox="1"/>
+          <p:nvPr/>
+        </p:nvSpPr>
+        <p:spPr>
+          <a:xfrm>
+            <a:off x="10972800" y="6400800"/>
+            <a:ext cx="640080" cy="274320"/>
+          </a:xfrm>
+          <a:prstGeom prst="rect">
+            <a:avLst/>
+          </a:prstGeom>
+          <a:noFill/>
+        </p:spPr>
+        <p:txBody>
+          <a:bodyPr wrap="none">
+            <a:spAutoFit/>
+          </a:bodyPr>
+          <a:lstStyle/>
+          <a:p>
+            <a:pPr algn="r">
+              <a:spcAft>
+                <a:spcPts val="400"/>
+              </a:spcAft>
+              <a:defRPr sz="1100" b="0" i="0">
+                <a:solidFill>
+                  <a:srgbClr val="5A6C7D"/>
+                </a:solidFill>
+              </a:defRPr>
+            </a:pPr>
+            <a:r>
+              <a:t>10/10</a:t>
+            </a:r>
+          </a:p>
+        </p:txBody>
+      </p:sp>
+      <p:sp>
+        <p:nvSpPr>
+          <p:cNvPr id="6" name="Rounded Rectangle 5"/>
+          <p:cNvSpPr/>
+          <p:nvPr/>
+        </p:nvSpPr>
+        <p:spPr>
+          <a:xfrm>
+            <a:off x="640080" y="1737360"/>
+            <a:ext cx="5303520" cy="4206240"/>
+          </a:xfrm>
+          <a:prstGeom prst="roundRect">
+            <a:avLst/>
+          </a:prstGeom>
+          <a:solidFill>
+            <a:srgbClr val="FFFFFF"/>
+          </a:solidFill>
+          <a:ln>
+            <a:noFill/>
+          </a:ln>
+          <a:effectLst/>
+        </p:spPr>
+        <p:style>
+          <a:lnRef idx="1">
+            <a:schemeClr val="accent1"/>
+          </a:lnRef>
+          <a:fillRef idx="3">
+            <a:schemeClr val="accent1"/>
+          </a:fillRef>
+          <a:effectRef idx="2">
+            <a:schemeClr val="accent1"/>
+          </a:effectRef>
+          <a:fontRef idx="minor">
+            <a:schemeClr val="lt1"/>
+          </a:fontRef>
+        </p:style>
+        <p:txBody>
+          <a:bodyPr rtlCol="0" anchor="ctr" wrap="square" lIns="201168" rIns="201168" tIns="128016"/>
+          <a:lstStyle/>
+          <a:p>
+            <a:pPr algn="ctr">
+              <a:spcAft>
+                <a:spcPts val="400"/>
+              </a:spcAft>
+              <a:defRPr sz="1700" b="1" i="0">
+                <a:solidFill>
+                  <a:srgbClr val="142B4D"/>
+                </a:solidFill>
+              </a:defRPr>
+            </a:pPr>
+            <a:r>
+              <a:t>Mini-glossario</a:t>
+            </a:r>
+          </a:p>
+          <a:p>
+            <a:pPr>
+              <a:spcAft>
+                <a:spcPts val="400"/>
+              </a:spcAft>
+              <a:defRPr sz="1400" b="0" i="0">
+                <a:solidFill>
+                  <a:srgbClr val="5A6C7D"/>
+                </a:solidFill>
+              </a:defRPr>
+            </a:pPr>
+            <a:r>
+              <a:t>Edge #N: filo locale al canvas (ricontrollare dopo ogni ricablaggio).</a:t>
+            </a:r>
+            <a:br/>
+            <a:r>
+              <a:t>{question}: record pagina dell'iterazione.</a:t>
+            </a:r>
+            <a:br/>
+            <a:r>
+              <a:t>Envelope: ramo + pagina + output (ogni dato ha provenienza).</a:t>
+            </a:r>
+            <a:br/>
+            <a:r>
+              <a:t>observed_* ≠ ground truth se review_required.</a:t>
+            </a:r>
+          </a:p>
+        </p:txBody>
+      </p:sp>
+      <p:sp>
+        <p:nvSpPr>
+          <p:cNvPr id="7" name="Rounded Rectangle 6"/>
+          <p:cNvSpPr/>
+          <p:nvPr/>
+        </p:nvSpPr>
+        <p:spPr>
+          <a:xfrm>
+            <a:off x="6309360" y="1737360"/>
+            <a:ext cx="5212080" cy="4206240"/>
+          </a:xfrm>
+          <a:prstGeom prst="roundRect">
+            <a:avLst/>
+          </a:prstGeom>
+          <a:solidFill>
+            <a:srgbClr val="FFFFFF"/>
+          </a:solidFill>
+          <a:ln>
+            <a:noFill/>
+          </a:ln>
+          <a:effectLst/>
+        </p:spPr>
+        <p:style>
+          <a:lnRef idx="1">
+            <a:schemeClr val="accent1"/>
+          </a:lnRef>
+          <a:fillRef idx="3">
+            <a:schemeClr val="accent1"/>
+          </a:fillRef>
+          <a:effectRef idx="2">
+            <a:schemeClr val="accent1"/>
+          </a:effectRef>
+          <a:fontRef idx="minor">
+            <a:schemeClr val="lt1"/>
+          </a:fontRef>
+        </p:style>
+        <p:txBody>
+          <a:bodyPr rtlCol="0" anchor="ctr" wrap="square" lIns="201168" rIns="201168" tIns="128016"/>
+          <a:lstStyle/>
+          <a:p>
+            <a:pPr algn="ctr">
+              <a:spcAft>
+                <a:spcPts val="400"/>
+              </a:spcAft>
+              <a:defRPr sz="1700" b="1" i="0">
+                <a:solidFill>
+                  <a:srgbClr val="142B4D"/>
+                </a:solidFill>
+              </a:defRPr>
+            </a:pPr>
+            <a:r>
+              <a:t>Aperti</a:t>
+            </a:r>
+          </a:p>
+          <a:p>
+            <a:pPr>
+              <a:spcAft>
+                <a:spcPts val="400"/>
+              </a:spcAft>
+              <a:defRPr sz="1400" b="0" i="0">
+                <a:solidFill>
+                  <a:srgbClr val="5A6C7D"/>
+                </a:solidFill>
+              </a:defRPr>
+            </a:pPr>
+            <a:r>
+              <a:t>Scala TF non collegata · limiti JOB · TEXTON parziali REG 3.</a:t>
+            </a:r>
+            <a:br/>
+            <a:r>
+              <a:t>Decisioni cliente: zeri iniziali, BISON, regola V2.</a:t>
+            </a:r>
+            <a:br/>
+            <a:r>
+              <a:t>Prossimo: caso 7 e terza coppia mai vista.</a:t>
             </a:r>
           </a:p>
         </p:txBody>
@@ -3211,7 +3661,7 @@
     <p:bg>
       <p:bgPr>
         <a:solidFill>
-          <a:srgbClr val="FFFFFF"/>
+          <a:srgbClr val="142B4D"/>
         </a:solidFill>
         <a:effectLst/>
       </p:bgPr>
@@ -3232,13 +3682,13 @@
         <p:spPr>
           <a:xfrm>
             <a:off x="0" y="0"/>
-            <a:ext cx="12191695" cy="109728"/>
+            <a:ext cx="12191695" cy="91440"/>
           </a:xfrm>
           <a:prstGeom prst="rect">
             <a:avLst/>
           </a:prstGeom>
           <a:solidFill>
-            <a:srgbClr val="2E86AB"/>
+            <a:srgbClr val="E8A82E"/>
           </a:solidFill>
           <a:ln>
             <a:noFill/>
@@ -3261,7 +3711,7 @@
         <p:spPr>
           <a:xfrm>
             <a:off x="640080" y="320040"/>
-            <a:ext cx="10881360" cy="1005840"/>
+            <a:ext cx="10881360" cy="1051560"/>
           </a:xfrm>
           <a:prstGeom prst="rect">
             <a:avLst/>
@@ -3273,20 +3723,34 @@
             <a:spAutoFit/>
           </a:bodyPr>
           <a:lstStyle/>
-          <a:p/>
           <a:p>
             <a:pPr>
               <a:spcAft>
-                <a:spcPts val="600"/>
+                <a:spcPts val="100"/>
               </a:spcAft>
-              <a:defRPr sz="3400" b="1">
-                <a:solidFill>
-                  <a:srgbClr val="1B2A4A"/>
-                </a:solidFill>
-              </a:defRPr>
-            </a:pPr>
-            <a:r>
-              <a:t>1 · Il problema</a:t>
+              <a:defRPr sz="1300" b="1" i="0">
+                <a:solidFill>
+                  <a:srgbClr val="E8A82E"/>
+                </a:solidFill>
+              </a:defRPr>
+            </a:pPr>
+            <a:r>
+              <a:t>01 · IL PROBLEMA</a:t>
+            </a:r>
+          </a:p>
+          <a:p>
+            <a:pPr>
+              <a:spcAft>
+                <a:spcPts val="400"/>
+              </a:spcAft>
+              <a:defRPr sz="3000" b="1" i="0">
+                <a:solidFill>
+                  <a:srgbClr val="FFFFFF"/>
+                </a:solidFill>
+              </a:defRPr>
+            </a:pPr>
+            <a:r>
+              <a:t>Due documenti, un solo impianto</a:t>
             </a:r>
           </a:p>
         </p:txBody>
@@ -3299,8 +3763,8 @@
         </p:nvSpPr>
         <p:spPr>
           <a:xfrm>
-            <a:off x="640080" y="1463040"/>
-            <a:ext cx="10881360" cy="5029200"/>
+            <a:off x="548640" y="6400800"/>
+            <a:ext cx="11064240" cy="274320"/>
           </a:xfrm>
           <a:prstGeom prst="rect">
             <a:avLst/>
@@ -3312,95 +3776,282 @@
             <a:spAutoFit/>
           </a:bodyPr>
           <a:lstStyle/>
-          <a:p/>
           <a:p>
             <a:pPr>
               <a:spcAft>
-                <a:spcPts val="100"/>
+                <a:spcPts val="400"/>
               </a:spcAft>
-              <a:defRPr sz="1900" b="1">
-                <a:solidFill>
-                  <a:srgbClr val="212121"/>
-                </a:solidFill>
-              </a:defRPr>
-            </a:pPr>
-            <a:r>
-              <a:t>▪  Due documenti, un impianto</a:t>
+              <a:defRPr sz="1100" b="0" i="0">
+                <a:solidFill>
+                  <a:srgbClr val="5A6C7D"/>
+                </a:solidFill>
+              </a:defRPr>
+            </a:pPr>
+            <a:r>
+              <a:t>Menerva MAS  ·  Double PDF IOL+JOB  ·  caso 6 JOB.0139.23</a:t>
+            </a:r>
+          </a:p>
+        </p:txBody>
+      </p:sp>
+      <p:sp>
+        <p:nvSpPr>
+          <p:cNvPr id="5" name="TextBox 4"/>
+          <p:cNvSpPr txBox="1"/>
+          <p:nvPr/>
+        </p:nvSpPr>
+        <p:spPr>
+          <a:xfrm>
+            <a:off x="10972800" y="6400800"/>
+            <a:ext cx="640080" cy="274320"/>
+          </a:xfrm>
+          <a:prstGeom prst="rect">
+            <a:avLst/>
+          </a:prstGeom>
+          <a:noFill/>
+        </p:spPr>
+        <p:txBody>
+          <a:bodyPr wrap="none">
+            <a:spAutoFit/>
+          </a:bodyPr>
+          <a:lstStyle/>
+          <a:p>
+            <a:pPr algn="r">
+              <a:spcAft>
+                <a:spcPts val="400"/>
+              </a:spcAft>
+              <a:defRPr sz="1100" b="0" i="0">
+                <a:solidFill>
+                  <a:srgbClr val="5A6C7D"/>
+                </a:solidFill>
+              </a:defRPr>
+            </a:pPr>
+            <a:r>
+              <a:t>2/10</a:t>
+            </a:r>
+          </a:p>
+        </p:txBody>
+      </p:sp>
+      <p:sp>
+        <p:nvSpPr>
+          <p:cNvPr id="6" name="Rounded Rectangle 5"/>
+          <p:cNvSpPr/>
+          <p:nvPr/>
+        </p:nvSpPr>
+        <p:spPr>
+          <a:xfrm>
+            <a:off x="640080" y="1737360"/>
+            <a:ext cx="3383280" cy="4206240"/>
+          </a:xfrm>
+          <a:prstGeom prst="roundRect">
+            <a:avLst/>
+          </a:prstGeom>
+          <a:solidFill>
+            <a:srgbClr val="FFFFFF"/>
+          </a:solidFill>
+          <a:ln>
+            <a:noFill/>
+          </a:ln>
+          <a:effectLst/>
+        </p:spPr>
+        <p:style>
+          <a:lnRef idx="1">
+            <a:schemeClr val="accent1"/>
+          </a:lnRef>
+          <a:fillRef idx="3">
+            <a:schemeClr val="accent1"/>
+          </a:fillRef>
+          <a:effectRef idx="2">
+            <a:schemeClr val="accent1"/>
+          </a:effectRef>
+          <a:fontRef idx="minor">
+            <a:schemeClr val="lt1"/>
+          </a:fontRef>
+        </p:style>
+        <p:txBody>
+          <a:bodyPr rtlCol="0" anchor="ctr" wrap="square" lIns="201168" rIns="201168" tIns="128016"/>
+          <a:lstStyle/>
+          <a:p>
+            <a:pPr algn="ctr">
+              <a:spcAft>
+                <a:spcPts val="400"/>
+              </a:spcAft>
+              <a:defRPr sz="1700" b="1" i="0">
+                <a:solidFill>
+                  <a:srgbClr val="142B4D"/>
+                </a:solidFill>
+              </a:defRPr>
+            </a:pPr>
+            <a:r>
+              <a:t>La coppia IOL + JOB</a:t>
             </a:r>
           </a:p>
           <a:p>
             <a:pPr>
               <a:spcAft>
-                <a:spcPts val="1000"/>
+                <a:spcPts val="400"/>
               </a:spcAft>
-              <a:defRPr sz="1600" b="0">
-                <a:solidFill>
-                  <a:srgbClr val="444444"/>
-                </a:solidFill>
-              </a:defRPr>
-            </a:pPr>
-            <a:r>
-              <a:t>     Mappatura IOL (tabelle registri) + descrizione JOB (IP, scale, limiti, logiche).</a:t>
+              <a:defRPr sz="1400" b="0" i="0">
+                <a:solidFill>
+                  <a:srgbClr val="5A6C7D"/>
+                </a:solidFill>
+              </a:defRPr>
+            </a:pPr>
+            <a:r>
+              <a:t>Mappatura IOL: tabelle registri PLC/SCADA.</a:t>
+            </a:r>
+            <a:br/>
+            <a:r>
+              <a:t>Descrizione JOB: IP, scale, limiti, logiche.</a:t>
+            </a:r>
+            <a:br/>
+            <a:r>
+              <a:t>Caso 6: 5 + 9 pagine (JOB.0139.23).</a:t>
+            </a:r>
+          </a:p>
+        </p:txBody>
+      </p:sp>
+      <p:sp>
+        <p:nvSpPr>
+          <p:cNvPr id="7" name="Rounded Rectangle 6"/>
+          <p:cNvSpPr/>
+          <p:nvPr/>
+        </p:nvSpPr>
+        <p:spPr>
+          <a:xfrm>
+            <a:off x="4389120" y="1737360"/>
+            <a:ext cx="3383280" cy="4206240"/>
+          </a:xfrm>
+          <a:prstGeom prst="roundRect">
+            <a:avLst/>
+          </a:prstGeom>
+          <a:solidFill>
+            <a:srgbClr val="FFFFFF"/>
+          </a:solidFill>
+          <a:ln>
+            <a:noFill/>
+          </a:ln>
+          <a:effectLst/>
+        </p:spPr>
+        <p:style>
+          <a:lnRef idx="1">
+            <a:schemeClr val="accent1"/>
+          </a:lnRef>
+          <a:fillRef idx="3">
+            <a:schemeClr val="accent1"/>
+          </a:fillRef>
+          <a:effectRef idx="2">
+            <a:schemeClr val="accent1"/>
+          </a:effectRef>
+          <a:fontRef idx="minor">
+            <a:schemeClr val="lt1"/>
+          </a:fontRef>
+        </p:style>
+        <p:txBody>
+          <a:bodyPr rtlCol="0" anchor="ctr" wrap="square" lIns="201168" rIns="201168" tIns="128016"/>
+          <a:lstStyle/>
+          <a:p>
+            <a:pPr algn="ctr">
+              <a:spcAft>
+                <a:spcPts val="400"/>
+              </a:spcAft>
+              <a:defRPr sz="1700" b="1" i="0">
+                <a:solidFill>
+                  <a:srgbClr val="142B4D"/>
+                </a:solidFill>
+              </a:defRPr>
+            </a:pPr>
+            <a:r>
+              <a:t>Upload cieco</a:t>
             </a:r>
           </a:p>
           <a:p>
             <a:pPr>
               <a:spcAft>
-                <a:spcPts val="100"/>
+                <a:spcPts val="400"/>
               </a:spcAft>
-              <a:defRPr sz="1900" b="1">
-                <a:solidFill>
-                  <a:srgbClr val="212121"/>
-                </a:solidFill>
-              </a:defRPr>
-            </a:pPr>
-            <a:r>
-              <a:t>▪  Upload cieco</a:t>
+              <a:defRPr sz="1400" b="0" i="0">
+                <a:solidFill>
+                  <a:srgbClr val="5A6C7D"/>
+                </a:solidFill>
+              </a:defRPr>
+            </a:pPr>
+            <a:r>
+              <a:t>Caricati insieme, in ordine casuale, senza metadati di origine.</a:t>
+            </a:r>
+            <a:br/>
+            <a:r>
+              <a:t>La piattaforma non sa quale pagina appartiene a quale documento.</a:t>
+            </a:r>
+          </a:p>
+        </p:txBody>
+      </p:sp>
+      <p:sp>
+        <p:nvSpPr>
+          <p:cNvPr id="8" name="Rounded Rectangle 7"/>
+          <p:cNvSpPr/>
+          <p:nvPr/>
+        </p:nvSpPr>
+        <p:spPr>
+          <a:xfrm>
+            <a:off x="8138160" y="1737360"/>
+            <a:ext cx="3383280" cy="4206240"/>
+          </a:xfrm>
+          <a:prstGeom prst="roundRect">
+            <a:avLst/>
+          </a:prstGeom>
+          <a:solidFill>
+            <a:srgbClr val="FFFFFF"/>
+          </a:solidFill>
+          <a:ln>
+            <a:noFill/>
+          </a:ln>
+          <a:effectLst/>
+        </p:spPr>
+        <p:style>
+          <a:lnRef idx="1">
+            <a:schemeClr val="accent1"/>
+          </a:lnRef>
+          <a:fillRef idx="3">
+            <a:schemeClr val="accent1"/>
+          </a:fillRef>
+          <a:effectRef idx="2">
+            <a:schemeClr val="accent1"/>
+          </a:effectRef>
+          <a:fontRef idx="minor">
+            <a:schemeClr val="lt1"/>
+          </a:fontRef>
+        </p:style>
+        <p:txBody>
+          <a:bodyPr rtlCol="0" anchor="ctr" wrap="square" lIns="201168" rIns="201168" tIns="128016"/>
+          <a:lstStyle/>
+          <a:p>
+            <a:pPr algn="ctr">
+              <a:spcAft>
+                <a:spcPts val="400"/>
+              </a:spcAft>
+              <a:defRPr sz="1700" b="1" i="0">
+                <a:solidFill>
+                  <a:srgbClr val="142B4D"/>
+                </a:solidFill>
+              </a:defRPr>
+            </a:pPr>
+            <a:r>
+              <a:t>L'obiettivo</a:t>
             </a:r>
           </a:p>
           <a:p>
             <a:pPr>
               <a:spcAft>
-                <a:spcPts val="1000"/>
+                <a:spcPts val="400"/>
               </a:spcAft>
-              <a:defRPr sz="1600" b="0">
-                <a:solidFill>
-                  <a:srgbClr val="444444"/>
-                </a:solidFill>
-              </a:defRPr>
-            </a:pPr>
-            <a:r>
-              <a:t>     Caricati insieme, in ordine casuale, senza metadati: nessuno sa quale pagina appartiene a cosa.</a:t>
-            </a:r>
-          </a:p>
-          <a:p>
-            <a:pPr>
-              <a:spcAft>
-                <a:spcPts val="100"/>
-              </a:spcAft>
-              <a:defRPr sz="1900" b="1">
-                <a:solidFill>
-                  <a:srgbClr val="212121"/>
-                </a:solidFill>
-              </a:defRPr>
-            </a:pPr>
-            <a:r>
-              <a:t>▪  Obiettivo</a:t>
-            </a:r>
-          </a:p>
-          <a:p>
-            <a:pPr>
-              <a:spcAft>
-                <a:spcPts val="1000"/>
-              </a:spcAft>
-              <a:defRPr sz="1600" b="0">
-                <a:solidFill>
-                  <a:srgbClr val="444444"/>
-                </a:solidFill>
-              </a:defRPr>
-            </a:pPr>
-            <a:r>
-              <a:t>     Un solo JSON ADAS, con ogni scelta tracciabile e ogni dubbio in revisione.</a:t>
+              <a:defRPr sz="1400" b="0" i="0">
+                <a:solidFill>
+                  <a:srgbClr val="5A6C7D"/>
+                </a:solidFill>
+              </a:defRPr>
+            </a:pPr>
+            <a:r>
+              <a:t>Un solo JSON ADAS importabile, con ogni scelta tracciabile e ogni dubbio in coda di revisione — mai un dato silenzioso.</a:t>
             </a:r>
           </a:p>
         </p:txBody>
@@ -3419,7 +4070,7 @@
     <p:bg>
       <p:bgPr>
         <a:solidFill>
-          <a:srgbClr val="FFFFFF"/>
+          <a:srgbClr val="142B4D"/>
         </a:solidFill>
         <a:effectLst/>
       </p:bgPr>
@@ -3440,9 +4091,167 @@
         <p:spPr>
           <a:xfrm>
             <a:off x="0" y="0"/>
-            <a:ext cx="12191695" cy="109728"/>
+            <a:ext cx="12191695" cy="91440"/>
           </a:xfrm>
           <a:prstGeom prst="rect">
+            <a:avLst/>
+          </a:prstGeom>
+          <a:solidFill>
+            <a:srgbClr val="E8A82E"/>
+          </a:solidFill>
+          <a:ln>
+            <a:noFill/>
+          </a:ln>
+        </p:spPr>
+        <p:txBody>
+          <a:bodyPr wrap="none">
+            <a:spAutoFit/>
+          </a:bodyPr>
+          <a:lstStyle/>
+          <a:p/>
+        </p:txBody>
+      </p:sp>
+      <p:sp>
+        <p:nvSpPr>
+          <p:cNvPr id="3" name="TextBox 2"/>
+          <p:cNvSpPr txBox="1"/>
+          <p:nvPr/>
+        </p:nvSpPr>
+        <p:spPr>
+          <a:xfrm>
+            <a:off x="640080" y="320040"/>
+            <a:ext cx="10881360" cy="1051560"/>
+          </a:xfrm>
+          <a:prstGeom prst="rect">
+            <a:avLst/>
+          </a:prstGeom>
+          <a:noFill/>
+        </p:spPr>
+        <p:txBody>
+          <a:bodyPr wrap="square">
+            <a:spAutoFit/>
+          </a:bodyPr>
+          <a:lstStyle/>
+          <a:p>
+            <a:pPr>
+              <a:spcAft>
+                <a:spcPts val="100"/>
+              </a:spcAft>
+              <a:defRPr sz="1300" b="1" i="0">
+                <a:solidFill>
+                  <a:srgbClr val="E8A82E"/>
+                </a:solidFill>
+              </a:defRPr>
+            </a:pPr>
+            <a:r>
+              <a:t>02 · L'IDEA</a:t>
+            </a:r>
+          </a:p>
+          <a:p>
+            <a:pPr>
+              <a:spcAft>
+                <a:spcPts val="400"/>
+              </a:spcAft>
+              <a:defRPr sz="3000" b="1" i="0">
+                <a:solidFill>
+                  <a:srgbClr val="FFFFFF"/>
+                </a:solidFill>
+              </a:defRPr>
+            </a:pPr>
+            <a:r>
+              <a:t>Il VLM legge, Python calcola</a:t>
+            </a:r>
+          </a:p>
+        </p:txBody>
+      </p:sp>
+      <p:sp>
+        <p:nvSpPr>
+          <p:cNvPr id="4" name="TextBox 3"/>
+          <p:cNvSpPr txBox="1"/>
+          <p:nvPr/>
+        </p:nvSpPr>
+        <p:spPr>
+          <a:xfrm>
+            <a:off x="548640" y="6400800"/>
+            <a:ext cx="11064240" cy="274320"/>
+          </a:xfrm>
+          <a:prstGeom prst="rect">
+            <a:avLst/>
+          </a:prstGeom>
+          <a:noFill/>
+        </p:spPr>
+        <p:txBody>
+          <a:bodyPr wrap="square">
+            <a:spAutoFit/>
+          </a:bodyPr>
+          <a:lstStyle/>
+          <a:p>
+            <a:pPr>
+              <a:spcAft>
+                <a:spcPts val="400"/>
+              </a:spcAft>
+              <a:defRPr sz="1100" b="0" i="0">
+                <a:solidFill>
+                  <a:srgbClr val="5A6C7D"/>
+                </a:solidFill>
+              </a:defRPr>
+            </a:pPr>
+            <a:r>
+              <a:t>Menerva MAS  ·  Double PDF IOL+JOB  ·  caso 6 JOB.0139.23</a:t>
+            </a:r>
+          </a:p>
+        </p:txBody>
+      </p:sp>
+      <p:sp>
+        <p:nvSpPr>
+          <p:cNvPr id="5" name="TextBox 4"/>
+          <p:cNvSpPr txBox="1"/>
+          <p:nvPr/>
+        </p:nvSpPr>
+        <p:spPr>
+          <a:xfrm>
+            <a:off x="10972800" y="6400800"/>
+            <a:ext cx="640080" cy="274320"/>
+          </a:xfrm>
+          <a:prstGeom prst="rect">
+            <a:avLst/>
+          </a:prstGeom>
+          <a:noFill/>
+        </p:spPr>
+        <p:txBody>
+          <a:bodyPr wrap="none">
+            <a:spAutoFit/>
+          </a:bodyPr>
+          <a:lstStyle/>
+          <a:p>
+            <a:pPr algn="r">
+              <a:spcAft>
+                <a:spcPts val="400"/>
+              </a:spcAft>
+              <a:defRPr sz="1100" b="0" i="0">
+                <a:solidFill>
+                  <a:srgbClr val="5A6C7D"/>
+                </a:solidFill>
+              </a:defRPr>
+            </a:pPr>
+            <a:r>
+              <a:t>3/10</a:t>
+            </a:r>
+          </a:p>
+        </p:txBody>
+      </p:sp>
+      <p:sp>
+        <p:nvSpPr>
+          <p:cNvPr id="6" name="Oval 5"/>
+          <p:cNvSpPr/>
+          <p:nvPr/>
+        </p:nvSpPr>
+        <p:spPr>
+          <a:xfrm>
+            <a:off x="914400" y="1920240"/>
+            <a:ext cx="640080" cy="640080"/>
+          </a:xfrm>
+          <a:prstGeom prst="ellipse">
             <a:avLst/>
           </a:prstGeom>
           <a:solidFill>
@@ -3452,24 +4261,47 @@
             <a:noFill/>
           </a:ln>
         </p:spPr>
-        <p:txBody>
-          <a:bodyPr wrap="none">
-            <a:spAutoFit/>
-          </a:bodyPr>
-          <a:lstStyle/>
-          <a:p/>
-        </p:txBody>
-      </p:sp>
-      <p:sp>
-        <p:nvSpPr>
-          <p:cNvPr id="3" name="TextBox 2"/>
+        <p:style>
+          <a:lnRef idx="1">
+            <a:schemeClr val="accent1"/>
+          </a:lnRef>
+          <a:fillRef idx="3">
+            <a:schemeClr val="accent1"/>
+          </a:fillRef>
+          <a:effectRef idx="2">
+            <a:schemeClr val="accent1"/>
+          </a:effectRef>
+          <a:fontRef idx="minor">
+            <a:schemeClr val="lt1"/>
+          </a:fontRef>
+        </p:style>
+        <p:txBody>
+          <a:bodyPr rtlCol="0" anchor="ctr" wrap="square"/>
+          <a:lstStyle/>
+          <a:p>
+            <a:pPr algn="ctr">
+              <a:defRPr sz="2000" b="1">
+                <a:solidFill>
+                  <a:srgbClr val="FFFFFF"/>
+                </a:solidFill>
+              </a:defRPr>
+            </a:pPr>
+            <a:r>
+              <a:t>1</a:t>
+            </a:r>
+          </a:p>
+        </p:txBody>
+      </p:sp>
+      <p:sp>
+        <p:nvSpPr>
+          <p:cNvPr id="7" name="TextBox 6"/>
           <p:cNvSpPr txBox="1"/>
           <p:nvPr/>
         </p:nvSpPr>
         <p:spPr>
           <a:xfrm>
-            <a:off x="640080" y="320040"/>
-            <a:ext cx="10881360" cy="1005840"/>
+            <a:off x="1737360" y="1828800"/>
+            <a:ext cx="2743200" cy="3840480"/>
           </a:xfrm>
           <a:prstGeom prst="rect">
             <a:avLst/>
@@ -3481,34 +4313,100 @@
             <a:spAutoFit/>
           </a:bodyPr>
           <a:lstStyle/>
-          <a:p/>
           <a:p>
             <a:pPr>
               <a:spcAft>
-                <a:spcPts val="600"/>
+                <a:spcPts val="400"/>
               </a:spcAft>
-              <a:defRPr sz="3400" b="1">
-                <a:solidFill>
-                  <a:srgbClr val="1B2A4A"/>
-                </a:solidFill>
-              </a:defRPr>
-            </a:pPr>
-            <a:r>
-              <a:t>2 · L'idea in una frase</a:t>
-            </a:r>
-          </a:p>
-        </p:txBody>
-      </p:sp>
-      <p:sp>
-        <p:nvSpPr>
-          <p:cNvPr id="4" name="TextBox 3"/>
+              <a:defRPr sz="2000" b="1" i="0">
+                <a:solidFill>
+                  <a:srgbClr val="142B4D"/>
+                </a:solidFill>
+              </a:defRPr>
+            </a:pPr>
+            <a:r>
+              <a:t>Classifica e trascrive</a:t>
+            </a:r>
+          </a:p>
+          <a:p>
+            <a:pPr>
+              <a:spcAft>
+                <a:spcPts val="400"/>
+              </a:spcAft>
+              <a:defRPr sz="1500" b="0" i="0">
+                <a:solidFill>
+                  <a:srgbClr val="5A6C7D"/>
+                </a:solidFill>
+              </a:defRPr>
+            </a:pPr>
+            <a:r>
+              <a:t>Il VLM assegna ruolo IOL/JOB e trascrive le tabelle riga per riga.</a:t>
+            </a:r>
+          </a:p>
+        </p:txBody>
+      </p:sp>
+      <p:sp>
+        <p:nvSpPr>
+          <p:cNvPr id="8" name="Oval 7"/>
+          <p:cNvSpPr/>
+          <p:nvPr/>
+        </p:nvSpPr>
+        <p:spPr>
+          <a:xfrm>
+            <a:off x="4572000" y="1920240"/>
+            <a:ext cx="640080" cy="640080"/>
+          </a:xfrm>
+          <a:prstGeom prst="ellipse">
+            <a:avLst/>
+          </a:prstGeom>
+          <a:solidFill>
+            <a:srgbClr val="2E86AB"/>
+          </a:solidFill>
+          <a:ln>
+            <a:noFill/>
+          </a:ln>
+        </p:spPr>
+        <p:style>
+          <a:lnRef idx="1">
+            <a:schemeClr val="accent1"/>
+          </a:lnRef>
+          <a:fillRef idx="3">
+            <a:schemeClr val="accent1"/>
+          </a:fillRef>
+          <a:effectRef idx="2">
+            <a:schemeClr val="accent1"/>
+          </a:effectRef>
+          <a:fontRef idx="minor">
+            <a:schemeClr val="lt1"/>
+          </a:fontRef>
+        </p:style>
+        <p:txBody>
+          <a:bodyPr rtlCol="0" anchor="ctr" wrap="square"/>
+          <a:lstStyle/>
+          <a:p>
+            <a:pPr algn="ctr">
+              <a:defRPr sz="2000" b="1">
+                <a:solidFill>
+                  <a:srgbClr val="FFFFFF"/>
+                </a:solidFill>
+              </a:defRPr>
+            </a:pPr>
+            <a:r>
+              <a:t>2</a:t>
+            </a:r>
+          </a:p>
+        </p:txBody>
+      </p:sp>
+      <p:sp>
+        <p:nvSpPr>
+          <p:cNvPr id="9" name="TextBox 8"/>
           <p:cNvSpPr txBox="1"/>
           <p:nvPr/>
         </p:nvSpPr>
         <p:spPr>
           <a:xfrm>
-            <a:off x="640080" y="1463040"/>
-            <a:ext cx="10881360" cy="5029200"/>
+            <a:off x="5394960" y="1828800"/>
+            <a:ext cx="2743200" cy="3840480"/>
           </a:xfrm>
           <a:prstGeom prst="rect">
             <a:avLst/>
@@ -3520,95 +4418,139 @@
             <a:spAutoFit/>
           </a:bodyPr>
           <a:lstStyle/>
-          <a:p/>
           <a:p>
             <a:pPr>
               <a:spcAft>
-                <a:spcPts val="100"/>
+                <a:spcPts val="400"/>
               </a:spcAft>
-              <a:defRPr sz="1900" b="1">
-                <a:solidFill>
-                  <a:srgbClr val="212121"/>
-                </a:solidFill>
-              </a:defRPr>
-            </a:pPr>
-            <a:r>
-              <a:t>▪  Il VLM legge, Python calcola</a:t>
+              <a:defRPr sz="2000" b="1" i="0">
+                <a:solidFill>
+                  <a:srgbClr val="142B4D"/>
+                </a:solidFill>
+              </a:defRPr>
+            </a:pPr>
+            <a:r>
+              <a:t>Filtra e unisce</a:t>
             </a:r>
           </a:p>
           <a:p>
             <a:pPr>
               <a:spcAft>
-                <a:spcPts val="1000"/>
+                <a:spcPts val="400"/>
               </a:spcAft>
-              <a:defRPr sz="1600" b="0">
-                <a:solidFill>
-                  <a:srgbClr val="444444"/>
-                </a:solidFill>
-              </a:defRPr>
-            </a:pPr>
-            <a:r>
-              <a:t>     VLM: classifica pagine e trascrive tabelle. Python: filtra, unisce, verifica.</a:t>
-            </a:r>
-          </a:p>
+              <a:defRPr sz="1500" b="0" i="0">
+                <a:solidFill>
+                  <a:srgbClr val="5A6C7D"/>
+                </a:solidFill>
+              </a:defRPr>
+            </a:pPr>
+            <a:r>
+              <a:t>Python deduplica, instrada per etichetta e fa join deterministici.</a:t>
+            </a:r>
+          </a:p>
+        </p:txBody>
+      </p:sp>
+      <p:sp>
+        <p:nvSpPr>
+          <p:cNvPr id="10" name="Oval 9"/>
+          <p:cNvSpPr/>
+          <p:nvPr/>
+        </p:nvSpPr>
+        <p:spPr>
+          <a:xfrm>
+            <a:off x="8229600" y="1920240"/>
+            <a:ext cx="640080" cy="640080"/>
+          </a:xfrm>
+          <a:prstGeom prst="ellipse">
+            <a:avLst/>
+          </a:prstGeom>
+          <a:solidFill>
+            <a:srgbClr val="E8A82E"/>
+          </a:solidFill>
+          <a:ln>
+            <a:noFill/>
+          </a:ln>
+        </p:spPr>
+        <p:style>
+          <a:lnRef idx="1">
+            <a:schemeClr val="accent1"/>
+          </a:lnRef>
+          <a:fillRef idx="3">
+            <a:schemeClr val="accent1"/>
+          </a:fillRef>
+          <a:effectRef idx="2">
+            <a:schemeClr val="accent1"/>
+          </a:effectRef>
+          <a:fontRef idx="minor">
+            <a:schemeClr val="lt1"/>
+          </a:fontRef>
+        </p:style>
+        <p:txBody>
+          <a:bodyPr rtlCol="0" anchor="ctr" wrap="square"/>
+          <a:lstStyle/>
+          <a:p>
+            <a:pPr algn="ctr">
+              <a:defRPr sz="2000" b="1">
+                <a:solidFill>
+                  <a:srgbClr val="FFFFFF"/>
+                </a:solidFill>
+              </a:defRPr>
+            </a:pPr>
+            <a:r>
+              <a:t>3</a:t>
+            </a:r>
+          </a:p>
+        </p:txBody>
+      </p:sp>
+      <p:sp>
+        <p:nvSpPr>
+          <p:cNvPr id="11" name="TextBox 10"/>
+          <p:cNvSpPr txBox="1"/>
+          <p:nvPr/>
+        </p:nvSpPr>
+        <p:spPr>
+          <a:xfrm>
+            <a:off x="9052560" y="1828800"/>
+            <a:ext cx="2743200" cy="3840480"/>
+          </a:xfrm>
+          <a:prstGeom prst="rect">
+            <a:avLst/>
+          </a:prstGeom>
+          <a:noFill/>
+        </p:spPr>
+        <p:txBody>
+          <a:bodyPr wrap="square">
+            <a:spAutoFit/>
+          </a:bodyPr>
+          <a:lstStyle/>
           <a:p>
             <a:pPr>
               <a:spcAft>
-                <a:spcPts val="100"/>
+                <a:spcPts val="400"/>
               </a:spcAft>
-              <a:defRPr sz="1900" b="1">
-                <a:solidFill>
-                  <a:srgbClr val="212121"/>
-                </a:solidFill>
-              </a:defRPr>
-            </a:pPr>
-            <a:r>
-              <a:t>▪  Mai invenzioni silenziose</a:t>
+              <a:defRPr sz="2000" b="1" i="0">
+                <a:solidFill>
+                  <a:srgbClr val="142B4D"/>
+                </a:solidFill>
+              </a:defRPr>
+            </a:pPr>
+            <a:r>
+              <a:t>Verifica, non inventa</a:t>
             </a:r>
           </a:p>
           <a:p>
             <a:pPr>
               <a:spcAft>
-                <a:spcPts val="1000"/>
+                <a:spcPts val="400"/>
               </a:spcAft>
-              <a:defRPr sz="1600" b="0">
-                <a:solidFill>
-                  <a:srgbClr val="444444"/>
-                </a:solidFill>
-              </a:defRPr>
-            </a:pPr>
-            <a:r>
-              <a:t>     Placeholder, default e conflitti finiscono in code di revisione, non nei dati.</a:t>
-            </a:r>
-          </a:p>
-          <a:p>
-            <a:pPr>
-              <a:spcAft>
-                <a:spcPts val="100"/>
-              </a:spcAft>
-              <a:defRPr sz="1900" b="1">
-                <a:solidFill>
-                  <a:srgbClr val="212121"/>
-                </a:solidFill>
-              </a:defRPr>
-            </a:pPr>
-            <a:r>
-              <a:t>▪  Ogni dato porta la provenienza</a:t>
-            </a:r>
-          </a:p>
-          <a:p>
-            <a:pPr>
-              <a:spcAft>
-                <a:spcPts val="1000"/>
-              </a:spcAft>
-              <a:defRPr sz="1600" b="0">
-                <a:solidFill>
-                  <a:srgbClr val="444444"/>
-                </a:solidFill>
-              </a:defRPr>
-            </a:pPr>
-            <a:r>
-              <a:t>     Envelope con ramo + pagina su ogni estrazione; join solo dentro la stessa run.</a:t>
+              <a:defRPr sz="1500" b="0" i="0">
+                <a:solidFill>
+                  <a:srgbClr val="5A6C7D"/>
+                </a:solidFill>
+              </a:defRPr>
+            </a:pPr>
+            <a:r>
+              <a:t>Placeholder, conflitti e buchi finiscono in review con pagina e regola.</a:t>
             </a:r>
           </a:p>
         </p:txBody>
@@ -3627,7 +4569,7 @@
     <p:bg>
       <p:bgPr>
         <a:solidFill>
-          <a:srgbClr val="FFFFFF"/>
+          <a:srgbClr val="142B4D"/>
         </a:solidFill>
         <a:effectLst/>
       </p:bgPr>
@@ -3648,9 +4590,284 @@
         <p:spPr>
           <a:xfrm>
             <a:off x="0" y="0"/>
-            <a:ext cx="12191695" cy="109728"/>
+            <a:ext cx="12191695" cy="91440"/>
           </a:xfrm>
           <a:prstGeom prst="rect">
+            <a:avLst/>
+          </a:prstGeom>
+          <a:solidFill>
+            <a:srgbClr val="E8A82E"/>
+          </a:solidFill>
+          <a:ln>
+            <a:noFill/>
+          </a:ln>
+        </p:spPr>
+        <p:txBody>
+          <a:bodyPr wrap="none">
+            <a:spAutoFit/>
+          </a:bodyPr>
+          <a:lstStyle/>
+          <a:p/>
+        </p:txBody>
+      </p:sp>
+      <p:sp>
+        <p:nvSpPr>
+          <p:cNvPr id="3" name="TextBox 2"/>
+          <p:cNvSpPr txBox="1"/>
+          <p:nvPr/>
+        </p:nvSpPr>
+        <p:spPr>
+          <a:xfrm>
+            <a:off x="640080" y="320040"/>
+            <a:ext cx="10881360" cy="1051560"/>
+          </a:xfrm>
+          <a:prstGeom prst="rect">
+            <a:avLst/>
+          </a:prstGeom>
+          <a:noFill/>
+        </p:spPr>
+        <p:txBody>
+          <a:bodyPr wrap="square">
+            <a:spAutoFit/>
+          </a:bodyPr>
+          <a:lstStyle/>
+          <a:p>
+            <a:pPr>
+              <a:spcAft>
+                <a:spcPts val="100"/>
+              </a:spcAft>
+              <a:defRPr sz="1300" b="1" i="0">
+                <a:solidFill>
+                  <a:srgbClr val="E8A82E"/>
+                </a:solidFill>
+              </a:defRPr>
+            </a:pPr>
+            <a:r>
+              <a:t>03 · ARCHITETTURA</a:t>
+            </a:r>
+          </a:p>
+          <a:p>
+            <a:pPr>
+              <a:spcAft>
+                <a:spcPts val="400"/>
+              </a:spcAft>
+              <a:defRPr sz="3000" b="1" i="0">
+                <a:solidFill>
+                  <a:srgbClr val="FFFFFF"/>
+                </a:solidFill>
+              </a:defRPr>
+            </a:pPr>
+            <a:r>
+              <a:t>Un livello smista, tre rami estraggono</a:t>
+            </a:r>
+          </a:p>
+        </p:txBody>
+      </p:sp>
+      <p:sp>
+        <p:nvSpPr>
+          <p:cNvPr id="4" name="TextBox 3"/>
+          <p:cNvSpPr txBox="1"/>
+          <p:nvPr/>
+        </p:nvSpPr>
+        <p:spPr>
+          <a:xfrm>
+            <a:off x="548640" y="6400800"/>
+            <a:ext cx="11064240" cy="274320"/>
+          </a:xfrm>
+          <a:prstGeom prst="rect">
+            <a:avLst/>
+          </a:prstGeom>
+          <a:noFill/>
+        </p:spPr>
+        <p:txBody>
+          <a:bodyPr wrap="square">
+            <a:spAutoFit/>
+          </a:bodyPr>
+          <a:lstStyle/>
+          <a:p>
+            <a:pPr>
+              <a:spcAft>
+                <a:spcPts val="400"/>
+              </a:spcAft>
+              <a:defRPr sz="1100" b="0" i="0">
+                <a:solidFill>
+                  <a:srgbClr val="5A6C7D"/>
+                </a:solidFill>
+              </a:defRPr>
+            </a:pPr>
+            <a:r>
+              <a:t>Menerva MAS  ·  Double PDF IOL+JOB  ·  caso 6 JOB.0139.23</a:t>
+            </a:r>
+          </a:p>
+        </p:txBody>
+      </p:sp>
+      <p:sp>
+        <p:nvSpPr>
+          <p:cNvPr id="5" name="TextBox 4"/>
+          <p:cNvSpPr txBox="1"/>
+          <p:nvPr/>
+        </p:nvSpPr>
+        <p:spPr>
+          <a:xfrm>
+            <a:off x="10972800" y="6400800"/>
+            <a:ext cx="640080" cy="274320"/>
+          </a:xfrm>
+          <a:prstGeom prst="rect">
+            <a:avLst/>
+          </a:prstGeom>
+          <a:noFill/>
+        </p:spPr>
+        <p:txBody>
+          <a:bodyPr wrap="none">
+            <a:spAutoFit/>
+          </a:bodyPr>
+          <a:lstStyle/>
+          <a:p>
+            <a:pPr algn="r">
+              <a:spcAft>
+                <a:spcPts val="400"/>
+              </a:spcAft>
+              <a:defRPr sz="1100" b="0" i="0">
+                <a:solidFill>
+                  <a:srgbClr val="5A6C7D"/>
+                </a:solidFill>
+              </a:defRPr>
+            </a:pPr>
+            <a:r>
+              <a:t>4/10</a:t>
+            </a:r>
+          </a:p>
+        </p:txBody>
+      </p:sp>
+      <p:sp>
+        <p:nvSpPr>
+          <p:cNvPr id="6" name="Rounded Rectangle 5"/>
+          <p:cNvSpPr/>
+          <p:nvPr/>
+        </p:nvSpPr>
+        <p:spPr>
+          <a:xfrm>
+            <a:off x="457200" y="2011680"/>
+            <a:ext cx="2011680" cy="2743200"/>
+          </a:xfrm>
+          <a:prstGeom prst="roundRect">
+            <a:avLst/>
+          </a:prstGeom>
+          <a:solidFill>
+            <a:srgbClr val="1E3D66"/>
+          </a:solidFill>
+          <a:ln>
+            <a:noFill/>
+          </a:ln>
+        </p:spPr>
+        <p:style>
+          <a:lnRef idx="1">
+            <a:schemeClr val="accent1"/>
+          </a:lnRef>
+          <a:fillRef idx="3">
+            <a:schemeClr val="accent1"/>
+          </a:fillRef>
+          <a:effectRef idx="2">
+            <a:schemeClr val="accent1"/>
+          </a:effectRef>
+          <a:fontRef idx="minor">
+            <a:schemeClr val="lt1"/>
+          </a:fontRef>
+        </p:style>
+        <p:txBody>
+          <a:bodyPr rtlCol="0" anchor="ctr" wrap="square"/>
+          <a:lstStyle/>
+          <a:p>
+            <a:pPr algn="ctr">
+              <a:spcAft>
+                <a:spcPts val="400"/>
+              </a:spcAft>
+              <a:defRPr sz="1600" b="1" i="0">
+                <a:solidFill>
+                  <a:srgbClr val="FFFFFF"/>
+                </a:solidFill>
+              </a:defRPr>
+            </a:pPr>
+            <a:r>
+              <a:t>LV1</a:t>
+            </a:r>
+            <a:br/>
+            <a:r>
+              <a:t>SMISTAMENTO</a:t>
+            </a:r>
+          </a:p>
+          <a:p>
+            <a:pPr algn="ctr">
+              <a:spcAft>
+                <a:spcPts val="400"/>
+              </a:spcAft>
+              <a:defRPr sz="1400" b="0" i="0">
+                <a:solidFill>
+                  <a:srgbClr val="FFFFFF"/>
+                </a:solidFill>
+              </a:defRPr>
+            </a:pPr>
+            <a:r>
+              <a:t>PNG → finestre</a:t>
+            </a:r>
+            <a:br/>
+            <a:r>
+              <a:t>classifier → dedup</a:t>
+            </a:r>
+            <a:br/>
+            <a:r>
+              <a:t>3 filtri</a:t>
+            </a:r>
+          </a:p>
+        </p:txBody>
+      </p:sp>
+      <p:cxnSp>
+        <p:nvCxnSpPr>
+          <p:cNvPr id="7" name="Connector 6"/>
+          <p:cNvCxnSpPr/>
+          <p:nvPr/>
+        </p:nvCxnSpPr>
+        <p:spPr>
+          <a:xfrm>
+            <a:off x="2468880" y="3383280"/>
+            <a:ext cx="320040" cy="0"/>
+          </a:xfrm>
+          <a:prstGeom prst="line">
+            <a:avLst/>
+          </a:prstGeom>
+          <a:ln w="38100">
+            <a:solidFill>
+              <a:srgbClr val="E8A82E"/>
+            </a:solidFill>
+          </a:ln>
+        </p:spPr>
+        <p:style>
+          <a:lnRef idx="2">
+            <a:schemeClr val="accent1"/>
+          </a:lnRef>
+          <a:fillRef idx="0">
+            <a:schemeClr val="accent1"/>
+          </a:fillRef>
+          <a:effectRef idx="1">
+            <a:schemeClr val="accent1"/>
+          </a:effectRef>
+          <a:fontRef idx="minor">
+            <a:schemeClr val="tx1"/>
+          </a:fontRef>
+        </p:style>
+      </p:cxnSp>
+      <p:sp>
+        <p:nvSpPr>
+          <p:cNvPr id="8" name="Rounded Rectangle 7"/>
+          <p:cNvSpPr/>
+          <p:nvPr/>
+        </p:nvSpPr>
+        <p:spPr>
+          <a:xfrm>
+            <a:off x="2788920" y="2011680"/>
+            <a:ext cx="2011680" cy="2743200"/>
+          </a:xfrm>
+          <a:prstGeom prst="roundRect">
             <a:avLst/>
           </a:prstGeom>
           <a:solidFill>
@@ -3660,163 +4877,390 @@
             <a:noFill/>
           </a:ln>
         </p:spPr>
-        <p:txBody>
-          <a:bodyPr wrap="none">
-            <a:spAutoFit/>
-          </a:bodyPr>
-          <a:lstStyle/>
-          <a:p/>
-        </p:txBody>
-      </p:sp>
-      <p:sp>
-        <p:nvSpPr>
-          <p:cNvPr id="3" name="TextBox 2"/>
-          <p:cNvSpPr txBox="1"/>
+        <p:style>
+          <a:lnRef idx="1">
+            <a:schemeClr val="accent1"/>
+          </a:lnRef>
+          <a:fillRef idx="3">
+            <a:schemeClr val="accent1"/>
+          </a:fillRef>
+          <a:effectRef idx="2">
+            <a:schemeClr val="accent1"/>
+          </a:effectRef>
+          <a:fontRef idx="minor">
+            <a:schemeClr val="lt1"/>
+          </a:fontRef>
+        </p:style>
+        <p:txBody>
+          <a:bodyPr rtlCol="0" anchor="ctr" wrap="square"/>
+          <a:lstStyle/>
+          <a:p>
+            <a:pPr algn="ctr">
+              <a:spcAft>
+                <a:spcPts val="400"/>
+              </a:spcAft>
+              <a:defRPr sz="1600" b="1" i="0">
+                <a:solidFill>
+                  <a:srgbClr val="FFFFFF"/>
+                </a:solidFill>
+              </a:defRPr>
+            </a:pPr>
+            <a:r>
+              <a:t>LV2 STATION</a:t>
+            </a:r>
+            <a:br/>
+            <a:r>
+              <a:t>6 pagine</a:t>
+            </a:r>
+          </a:p>
+          <a:p>
+            <a:pPr algn="ctr">
+              <a:spcAft>
+                <a:spcPts val="400"/>
+              </a:spcAft>
+              <a:defRPr sz="1400" b="0" i="0">
+                <a:solidFill>
+                  <a:srgbClr val="FFFFFF"/>
+                </a:solidFill>
+              </a:defRPr>
+            </a:pPr>
+            <a:r>
+              <a:t>IP · porta</a:t>
+            </a:r>
+            <a:br/>
+            <a:r>
+              <a:t>scale SO₂/TF</a:t>
+            </a:r>
+          </a:p>
+        </p:txBody>
+      </p:sp>
+      <p:cxnSp>
+        <p:nvCxnSpPr>
+          <p:cNvPr id="9" name="Connector 8"/>
+          <p:cNvCxnSpPr/>
           <p:nvPr/>
-        </p:nvSpPr>
-        <p:spPr>
-          <a:xfrm>
-            <a:off x="640080" y="320040"/>
-            <a:ext cx="10881360" cy="1005840"/>
-          </a:xfrm>
-          <a:prstGeom prst="rect">
+        </p:nvCxnSpPr>
+        <p:spPr>
+          <a:xfrm>
+            <a:off x="4800600" y="3383280"/>
+            <a:ext cx="320040" cy="0"/>
+          </a:xfrm>
+          <a:prstGeom prst="line">
             <a:avLst/>
           </a:prstGeom>
-          <a:noFill/>
-        </p:spPr>
-        <p:txBody>
-          <a:bodyPr wrap="square">
-            <a:spAutoFit/>
-          </a:bodyPr>
-          <a:lstStyle/>
-          <a:p/>
-          <a:p>
-            <a:pPr>
-              <a:spcAft>
-                <a:spcPts val="600"/>
-              </a:spcAft>
-              <a:defRPr sz="3400" b="1">
-                <a:solidFill>
-                  <a:srgbClr val="1B2A4A"/>
-                </a:solidFill>
-              </a:defRPr>
-            </a:pPr>
-            <a:r>
-              <a:t>3 · Architettura</a:t>
-            </a:r>
-          </a:p>
-        </p:txBody>
-      </p:sp>
-      <p:sp>
-        <p:nvSpPr>
-          <p:cNvPr id="4" name="TextBox 3"/>
-          <p:cNvSpPr txBox="1"/>
+          <a:ln w="38100">
+            <a:solidFill>
+              <a:srgbClr val="E8A82E"/>
+            </a:solidFill>
+          </a:ln>
+        </p:spPr>
+        <p:style>
+          <a:lnRef idx="2">
+            <a:schemeClr val="accent1"/>
+          </a:lnRef>
+          <a:fillRef idx="0">
+            <a:schemeClr val="accent1"/>
+          </a:fillRef>
+          <a:effectRef idx="1">
+            <a:schemeClr val="accent1"/>
+          </a:effectRef>
+          <a:fontRef idx="minor">
+            <a:schemeClr val="tx1"/>
+          </a:fontRef>
+        </p:style>
+      </p:cxnSp>
+      <p:sp>
+        <p:nvSpPr>
+          <p:cNvPr id="10" name="Rounded Rectangle 9"/>
+          <p:cNvSpPr/>
           <p:nvPr/>
         </p:nvSpPr>
         <p:spPr>
           <a:xfrm>
-            <a:off x="640080" y="1463040"/>
-            <a:ext cx="10881360" cy="5029200"/>
-          </a:xfrm>
-          <a:prstGeom prst="rect">
+            <a:off x="5120640" y="2011680"/>
+            <a:ext cx="2011680" cy="2743200"/>
+          </a:xfrm>
+          <a:prstGeom prst="roundRect">
             <a:avLst/>
           </a:prstGeom>
-          <a:noFill/>
-        </p:spPr>
-        <p:txBody>
-          <a:bodyPr wrap="square">
-            <a:spAutoFit/>
-          </a:bodyPr>
-          <a:lstStyle/>
-          <a:p/>
-          <a:p>
-            <a:pPr>
+          <a:solidFill>
+            <a:srgbClr val="1E3D66"/>
+          </a:solidFill>
+          <a:ln>
+            <a:noFill/>
+          </a:ln>
+        </p:spPr>
+        <p:style>
+          <a:lnRef idx="1">
+            <a:schemeClr val="accent1"/>
+          </a:lnRef>
+          <a:fillRef idx="3">
+            <a:schemeClr val="accent1"/>
+          </a:fillRef>
+          <a:effectRef idx="2">
+            <a:schemeClr val="accent1"/>
+          </a:effectRef>
+          <a:fontRef idx="minor">
+            <a:schemeClr val="lt1"/>
+          </a:fontRef>
+        </p:style>
+        <p:txBody>
+          <a:bodyPr rtlCol="0" anchor="ctr" wrap="square"/>
+          <a:lstStyle/>
+          <a:p>
+            <a:pPr algn="ctr">
               <a:spcAft>
-                <a:spcPts val="100"/>
+                <a:spcPts val="400"/>
               </a:spcAft>
-              <a:defRPr sz="1900" b="1">
-                <a:solidFill>
-                  <a:srgbClr val="212121"/>
-                </a:solidFill>
-              </a:defRPr>
-            </a:pPr>
-            <a:r>
-              <a:t>▪  LV1 — smistamento (1 esecuzione)</a:t>
-            </a:r>
-          </a:p>
-          <a:p>
-            <a:pPr>
+              <a:defRPr sz="1600" b="1" i="0">
+                <a:solidFill>
+                  <a:srgbClr val="FFFFFF"/>
+                </a:solidFill>
+              </a:defRPr>
+            </a:pPr>
+            <a:r>
+              <a:t>LV2 MEASURE</a:t>
+            </a:r>
+            <a:br/>
+            <a:r>
+              <a:t>7 pagine</a:t>
+            </a:r>
+          </a:p>
+          <a:p>
+            <a:pPr algn="ctr">
               <a:spcAft>
-                <a:spcPts val="1000"/>
+                <a:spcPts val="400"/>
               </a:spcAft>
-              <a:defRPr sz="1600" b="0">
-                <a:solidFill>
-                  <a:srgbClr val="444444"/>
-                </a:solidFill>
-              </a:defRPr>
-            </a:pPr>
-            <a:r>
-              <a:t>     Medex PNG → finestre → classifier iterativo → dedup → 3 filtri (Station / Measurement / Density).</a:t>
-            </a:r>
-          </a:p>
-          <a:p>
-            <a:pPr>
+              <a:defRPr sz="1400" b="0" i="0">
+                <a:solidFill>
+                  <a:srgbClr val="FFFFFF"/>
+                </a:solidFill>
+              </a:defRPr>
+            </a:pPr>
+            <a:r>
+              <a:t>3 VLM + tagger</a:t>
+            </a:r>
+            <a:br/>
+            <a:r>
+              <a:t>assemblatore</a:t>
+            </a:r>
+          </a:p>
+        </p:txBody>
+      </p:sp>
+      <p:cxnSp>
+        <p:nvCxnSpPr>
+          <p:cNvPr id="11" name="Connector 10"/>
+          <p:cNvCxnSpPr/>
+          <p:nvPr/>
+        </p:nvCxnSpPr>
+        <p:spPr>
+          <a:xfrm>
+            <a:off x="7132320" y="3383280"/>
+            <a:ext cx="320039" cy="0"/>
+          </a:xfrm>
+          <a:prstGeom prst="line">
+            <a:avLst/>
+          </a:prstGeom>
+          <a:ln w="38100">
+            <a:solidFill>
+              <a:srgbClr val="E8A82E"/>
+            </a:solidFill>
+          </a:ln>
+        </p:spPr>
+        <p:style>
+          <a:lnRef idx="2">
+            <a:schemeClr val="accent1"/>
+          </a:lnRef>
+          <a:fillRef idx="0">
+            <a:schemeClr val="accent1"/>
+          </a:fillRef>
+          <a:effectRef idx="1">
+            <a:schemeClr val="accent1"/>
+          </a:effectRef>
+          <a:fontRef idx="minor">
+            <a:schemeClr val="tx1"/>
+          </a:fontRef>
+        </p:style>
+      </p:cxnSp>
+      <p:sp>
+        <p:nvSpPr>
+          <p:cNvPr id="12" name="Rounded Rectangle 11"/>
+          <p:cNvSpPr/>
+          <p:nvPr/>
+        </p:nvSpPr>
+        <p:spPr>
+          <a:xfrm>
+            <a:off x="7452359" y="2011680"/>
+            <a:ext cx="2011680" cy="2743200"/>
+          </a:xfrm>
+          <a:prstGeom prst="roundRect">
+            <a:avLst/>
+          </a:prstGeom>
+          <a:solidFill>
+            <a:srgbClr val="2E86AB"/>
+          </a:solidFill>
+          <a:ln>
+            <a:noFill/>
+          </a:ln>
+        </p:spPr>
+        <p:style>
+          <a:lnRef idx="1">
+            <a:schemeClr val="accent1"/>
+          </a:lnRef>
+          <a:fillRef idx="3">
+            <a:schemeClr val="accent1"/>
+          </a:fillRef>
+          <a:effectRef idx="2">
+            <a:schemeClr val="accent1"/>
+          </a:effectRef>
+          <a:fontRef idx="minor">
+            <a:schemeClr val="lt1"/>
+          </a:fontRef>
+        </p:style>
+        <p:txBody>
+          <a:bodyPr rtlCol="0" anchor="ctr" wrap="square"/>
+          <a:lstStyle/>
+          <a:p>
+            <a:pPr algn="ctr">
               <a:spcAft>
-                <a:spcPts val="100"/>
+                <a:spcPts val="400"/>
               </a:spcAft>
-              <a:defRPr sz="1900" b="1">
-                <a:solidFill>
-                  <a:srgbClr val="212121"/>
-                </a:solidFill>
-              </a:defRPr>
-            </a:pPr>
-            <a:r>
-              <a:t>▪  LV2 — estrazione (3 rami paralleli)</a:t>
-            </a:r>
-          </a:p>
-          <a:p>
-            <a:pPr>
+              <a:defRPr sz="1600" b="1" i="0">
+                <a:solidFill>
+                  <a:srgbClr val="FFFFFF"/>
+                </a:solidFill>
+              </a:defRPr>
+            </a:pPr>
+            <a:r>
+              <a:t>CONSOLIDATORE</a:t>
+            </a:r>
+          </a:p>
+          <a:p>
+            <a:pPr algn="ctr">
               <a:spcAft>
-                <a:spcPts val="1000"/>
+                <a:spcPts val="400"/>
               </a:spcAft>
-              <a:defRPr sz="1600" b="0">
-                <a:solidFill>
-                  <a:srgbClr val="444444"/>
-                </a:solidFill>
-              </a:defRPr>
-            </a:pPr>
-            <a:r>
-              <a:t>     Station (IP, scale) · Measurement (3 VLM + tagger + assemblatore) · Density in forwarding.</a:t>
-            </a:r>
-          </a:p>
-          <a:p>
-            <a:pPr>
+              <a:defRPr sz="1400" b="0" i="0">
+                <a:solidFill>
+                  <a:srgbClr val="FFFFFF"/>
+                </a:solidFill>
+              </a:defRPr>
+            </a:pPr>
+            <a:r>
+              <a:t>1 stazione</a:t>
+            </a:r>
+            <a:br/>
+            <a:r>
+              <a:t>69 variabili</a:t>
+            </a:r>
+          </a:p>
+        </p:txBody>
+      </p:sp>
+      <p:cxnSp>
+        <p:nvCxnSpPr>
+          <p:cNvPr id="13" name="Connector 12"/>
+          <p:cNvCxnSpPr/>
+          <p:nvPr/>
+        </p:nvCxnSpPr>
+        <p:spPr>
+          <a:xfrm>
+            <a:off x="9464039" y="3383280"/>
+            <a:ext cx="320041" cy="0"/>
+          </a:xfrm>
+          <a:prstGeom prst="line">
+            <a:avLst/>
+          </a:prstGeom>
+          <a:ln w="38100">
+            <a:solidFill>
+              <a:srgbClr val="E8A82E"/>
+            </a:solidFill>
+          </a:ln>
+        </p:spPr>
+        <p:style>
+          <a:lnRef idx="2">
+            <a:schemeClr val="accent1"/>
+          </a:lnRef>
+          <a:fillRef idx="0">
+            <a:schemeClr val="accent1"/>
+          </a:fillRef>
+          <a:effectRef idx="1">
+            <a:schemeClr val="accent1"/>
+          </a:effectRef>
+          <a:fontRef idx="minor">
+            <a:schemeClr val="tx1"/>
+          </a:fontRef>
+        </p:style>
+      </p:cxnSp>
+      <p:sp>
+        <p:nvSpPr>
+          <p:cNvPr id="14" name="Rounded Rectangle 13"/>
+          <p:cNvSpPr/>
+          <p:nvPr/>
+        </p:nvSpPr>
+        <p:spPr>
+          <a:xfrm>
+            <a:off x="9784080" y="2011680"/>
+            <a:ext cx="2011680" cy="2743200"/>
+          </a:xfrm>
+          <a:prstGeom prst="roundRect">
+            <a:avLst/>
+          </a:prstGeom>
+          <a:solidFill>
+            <a:srgbClr val="1E3D66"/>
+          </a:solidFill>
+          <a:ln>
+            <a:noFill/>
+          </a:ln>
+        </p:spPr>
+        <p:style>
+          <a:lnRef idx="1">
+            <a:schemeClr val="accent1"/>
+          </a:lnRef>
+          <a:fillRef idx="3">
+            <a:schemeClr val="accent1"/>
+          </a:fillRef>
+          <a:effectRef idx="2">
+            <a:schemeClr val="accent1"/>
+          </a:effectRef>
+          <a:fontRef idx="minor">
+            <a:schemeClr val="lt1"/>
+          </a:fontRef>
+        </p:style>
+        <p:txBody>
+          <a:bodyPr rtlCol="0" anchor="ctr" wrap="square"/>
+          <a:lstStyle/>
+          <a:p>
+            <a:pPr algn="ctr">
               <a:spcAft>
-                <a:spcPts val="100"/>
+                <a:spcPts val="400"/>
               </a:spcAft>
-              <a:defRPr sz="1900" b="1">
-                <a:solidFill>
-                  <a:srgbClr val="212121"/>
-                </a:solidFill>
-              </a:defRPr>
-            </a:pPr>
-            <a:r>
-              <a:t>▪  Finale — consolidamento + ADAS</a:t>
-            </a:r>
-          </a:p>
-          <a:p>
-            <a:pPr>
+              <a:defRPr sz="1600" b="1" i="0">
+                <a:solidFill>
+                  <a:srgbClr val="FFFFFF"/>
+                </a:solidFill>
+              </a:defRPr>
+            </a:pPr>
+            <a:r>
+              <a:t>JSON CREATOR</a:t>
+            </a:r>
+          </a:p>
+          <a:p>
+            <a:pPr algn="ctr">
               <a:spcAft>
-                <a:spcPts val="1000"/>
+                <a:spcPts val="400"/>
               </a:spcAft>
-              <a:defRPr sz="1600" b="0">
-                <a:solidFill>
-                  <a:srgbClr val="444444"/>
-                </a:solidFill>
-              </a:defRPr>
-            </a:pPr>
-            <a:r>
-              <a:t>     PREPARAZIONE X JSON (1 stazione + 69 variabili) → JSON CREATOR (22 misure + 60 bitinfo).</a:t>
+              <a:defRPr sz="1400" b="0" i="0">
+                <a:solidFill>
+                  <a:srgbClr val="FFFFFF"/>
+                </a:solidFill>
+              </a:defRPr>
+            </a:pPr>
+            <a:r>
+              <a:t>22 misure</a:t>
+            </a:r>
+            <a:br/>
+            <a:r>
+              <a:t>60 bitinfo</a:t>
             </a:r>
           </a:p>
         </p:txBody>
@@ -3856,7 +5300,7 @@
         <p:spPr>
           <a:xfrm>
             <a:off x="0" y="0"/>
-            <a:ext cx="12191695" cy="109728"/>
+            <a:ext cx="12191695" cy="91440"/>
           </a:xfrm>
           <a:prstGeom prst="rect">
             <a:avLst/>
@@ -3885,7 +5329,7 @@
         <p:spPr>
           <a:xfrm>
             <a:off x="640080" y="320040"/>
-            <a:ext cx="10881360" cy="1005840"/>
+            <a:ext cx="10881360" cy="1051560"/>
           </a:xfrm>
           <a:prstGeom prst="rect">
             <a:avLst/>
@@ -3897,20 +5341,34 @@
             <a:spAutoFit/>
           </a:bodyPr>
           <a:lstStyle/>
-          <a:p/>
           <a:p>
             <a:pPr>
               <a:spcAft>
-                <a:spcPts val="600"/>
+                <a:spcPts val="100"/>
               </a:spcAft>
-              <a:defRPr sz="3400" b="1">
-                <a:solidFill>
-                  <a:srgbClr val="1B2A4A"/>
-                </a:solidFill>
-              </a:defRPr>
-            </a:pPr>
-            <a:r>
-              <a:t>4 · LV1 nodo per nodo</a:t>
+              <a:defRPr sz="1300" b="1" i="0">
+                <a:solidFill>
+                  <a:srgbClr val="2E86AB"/>
+                </a:solidFill>
+              </a:defRPr>
+            </a:pPr>
+            <a:r>
+              <a:t>04 · LIVELLO 1</a:t>
+            </a:r>
+          </a:p>
+          <a:p>
+            <a:pPr>
+              <a:spcAft>
+                <a:spcPts val="400"/>
+              </a:spcAft>
+              <a:defRPr sz="3000" b="1" i="0">
+                <a:solidFill>
+                  <a:srgbClr val="142B4D"/>
+                </a:solidFill>
+              </a:defRPr>
+            </a:pPr>
+            <a:r>
+              <a:t>Smistamento nodo per nodo</a:t>
             </a:r>
           </a:p>
         </p:txBody>
@@ -3923,8 +5381,8 @@
         </p:nvSpPr>
         <p:spPr>
           <a:xfrm>
-            <a:off x="640080" y="1463040"/>
-            <a:ext cx="5303520" cy="5029200"/>
+            <a:off x="548640" y="6400800"/>
+            <a:ext cx="11064240" cy="274320"/>
           </a:xfrm>
           <a:prstGeom prst="rect">
             <a:avLst/>
@@ -3936,125 +5394,19 @@
             <a:spAutoFit/>
           </a:bodyPr>
           <a:lstStyle/>
-          <a:p/>
           <a:p>
             <a:pPr>
               <a:spcAft>
-                <a:spcPts val="100"/>
+                <a:spcPts val="400"/>
               </a:spcAft>
-              <a:defRPr sz="1900" b="1">
-                <a:solidFill>
-                  <a:srgbClr val="212121"/>
-                </a:solidFill>
-              </a:defRPr>
-            </a:pPr>
-            <a:r>
-              <a:t>▪  CONVERTI PDF IN PNG (1) + FINESTRE (2)</a:t>
-            </a:r>
-          </a:p>
-          <a:p>
-            <a:pPr>
-              <a:spcAft>
-                <a:spcPts val="1000"/>
-              </a:spcAft>
-              <a:defRPr sz="1600" b="0">
-                <a:solidFill>
-                  <a:srgbClr val="444444"/>
-                </a:solidFill>
-              </a:defRPr>
-            </a:pPr>
-            <a:r>
-              <a:t>     14 finestre sovrapposte: ogni pagina compare 2 volte.</a:t>
-            </a:r>
-          </a:p>
-          <a:p>
-            <a:pPr>
-              <a:spcAft>
-                <a:spcPts val="100"/>
-              </a:spcAft>
-              <a:defRPr sz="1900" b="1">
-                <a:solidFill>
-                  <a:srgbClr val="212121"/>
-                </a:solidFill>
-              </a:defRPr>
-            </a:pPr>
-            <a:r>
-              <a:t>▪  DEDUPLICA (4) + PREPARA (5)</a:t>
-            </a:r>
-          </a:p>
-          <a:p>
-            <a:pPr>
-              <a:spcAft>
-                <a:spcPts val="1000"/>
-              </a:spcAft>
-              <a:defRPr sz="1600" b="0">
-                <a:solidFill>
-                  <a:srgbClr val="444444"/>
-                </a:solidFill>
-              </a:defRPr>
-            </a:pPr>
-            <a:r>
-              <a:t>     14 pagine uniche; array root con review propagati.</a:t>
-            </a:r>
-          </a:p>
-          <a:p>
-            <a:pPr>
-              <a:spcAft>
-                <a:spcPts val="100"/>
-              </a:spcAft>
-              <a:defRPr sz="1900" b="1">
-                <a:solidFill>
-                  <a:srgbClr val="212121"/>
-                </a:solidFill>
-              </a:defRPr>
-            </a:pPr>
-            <a:r>
-              <a:t>▪  INIEZIONI 10 / 9</a:t>
-            </a:r>
-          </a:p>
-          <a:p>
-            <a:pPr>
-              <a:spcAft>
-                <a:spcPts val="1000"/>
-              </a:spcAft>
-              <a:defRPr sz="1600" b="0">
-                <a:solidFill>
-                  <a:srgbClr val="444444"/>
-                </a:solidFill>
-              </a:defRPr>
-            </a:pPr>
-            <a:r>
-              <a:t>     Estrazione Station e Measurement, una pagina alla volta.</a:t>
-            </a:r>
-          </a:p>
-          <a:p>
-            <a:pPr>
-              <a:spcAft>
-                <a:spcPts val="100"/>
-              </a:spcAft>
-              <a:defRPr sz="1900" b="1">
-                <a:solidFill>
-                  <a:srgbClr val="212121"/>
-                </a:solidFill>
-              </a:defRPr>
-            </a:pPr>
-            <a:r>
-              <a:t>▪  JSON CREATOR (12) → OUTPUT (13)</a:t>
-            </a:r>
-          </a:p>
-          <a:p>
-            <a:pPr>
-              <a:spcAft>
-                <a:spcPts val="1000"/>
-              </a:spcAft>
-              <a:defRPr sz="1600" b="0">
-                <a:solidFill>
-                  <a:srgbClr val="444444"/>
-                </a:solidFill>
-              </a:defRPr>
-            </a:pPr>
-            <a:r>
-              <a:t>     DRIVERPRIVATE hex, DRIVERCONFIG XML, ID rinumerati.</a:t>
+              <a:defRPr sz="1100" b="0" i="0">
+                <a:solidFill>
+                  <a:srgbClr val="5A6C7D"/>
+                </a:solidFill>
+              </a:defRPr>
+            </a:pPr>
+            <a:r>
+              <a:t>Menerva MAS  ·  Double PDF IOL+JOB  ·  caso 6 JOB.0139.23</a:t>
             </a:r>
           </a:p>
         </p:txBody>
@@ -4067,8 +5419,8 @@
         </p:nvSpPr>
         <p:spPr>
           <a:xfrm>
-            <a:off x="6309360" y="1463040"/>
-            <a:ext cx="5303520" cy="5029200"/>
+            <a:off x="10972800" y="6400800"/>
+            <a:ext cx="640080" cy="274320"/>
           </a:xfrm>
           <a:prstGeom prst="rect">
             <a:avLst/>
@@ -4076,103 +5428,693 @@
           <a:noFill/>
         </p:spPr>
         <p:txBody>
-          <a:bodyPr wrap="square">
+          <a:bodyPr wrap="none">
             <a:spAutoFit/>
           </a:bodyPr>
           <a:lstStyle/>
-          <a:p/>
-          <a:p>
-            <a:pPr>
+          <a:p>
+            <a:pPr algn="r">
               <a:spcAft>
-                <a:spcPts val="100"/>
+                <a:spcPts val="400"/>
               </a:spcAft>
-              <a:defRPr sz="1900" b="1">
-                <a:solidFill>
-                  <a:srgbClr val="212121"/>
-                </a:solidFill>
-              </a:defRPr>
-            </a:pPr>
-            <a:r>
-              <a:t>▪  PAGE CLASSIFIER (3)</a:t>
-            </a:r>
-          </a:p>
-          <a:p>
-            <a:pPr>
-              <a:spcAft>
-                <a:spcPts val="1000"/>
-              </a:spcAft>
-              <a:defRPr sz="1600" b="0">
-                <a:solidFill>
-                  <a:srgbClr val="444444"/>
-                </a:solidFill>
-              </a:defRPr>
-            </a:pPr>
-            <a:r>
-              <a:t>     Ruolo IOL/JOB/UNKNOWN + etichetta per ogni finestra.</a:t>
-            </a:r>
-          </a:p>
-          <a:p>
-            <a:pPr>
-              <a:spcAft>
-                <a:spcPts val="100"/>
-              </a:spcAft>
-              <a:defRPr sz="1900" b="1">
-                <a:solidFill>
-                  <a:srgbClr val="212121"/>
-                </a:solidFill>
-              </a:defRPr>
-            </a:pPr>
-            <a:r>
-              <a:t>▪  FILTRI 6 / 7 / 8</a:t>
-            </a:r>
-          </a:p>
-          <a:p>
-            <a:pPr>
-              <a:spcAft>
-                <a:spcPts val="1000"/>
-              </a:spcAft>
-              <a:defRPr sz="1600" b="0">
-                <a:solidFill>
-                  <a:srgbClr val="444444"/>
-                </a:solidFill>
-              </a:defRPr>
-            </a:pPr>
-            <a:r>
-              <a:t>     Partizione 6 Station + 7 Measurement + 1 Density.</a:t>
-            </a:r>
-          </a:p>
-          <a:p>
-            <a:pPr>
-              <a:spcAft>
-                <a:spcPts val="100"/>
-              </a:spcAft>
-              <a:defRPr sz="1900" b="1">
-                <a:solidFill>
-                  <a:srgbClr val="212121"/>
-                </a:solidFill>
-              </a:defRPr>
-            </a:pPr>
-            <a:r>
-              <a:t>▪  PREPARAZIONE X JSON (11)</a:t>
-            </a:r>
-          </a:p>
-          <a:p>
-            <a:pPr>
-              <a:spcAft>
-                <a:spcPts val="1000"/>
-              </a:spcAft>
-              <a:defRPr sz="1600" b="0">
-                <a:solidFill>
-                  <a:srgbClr val="444444"/>
-                </a:solidFill>
-              </a:defRPr>
-            </a:pPr>
-            <a:r>
-              <a:t>     Unisce i 3 rami: stazione 10.100.50.95:511, scale SO2.</a:t>
-            </a:r>
-          </a:p>
-        </p:txBody>
-      </p:sp>
+              <a:defRPr sz="1100" b="0" i="0">
+                <a:solidFill>
+                  <a:srgbClr val="5A6C7D"/>
+                </a:solidFill>
+              </a:defRPr>
+            </a:pPr>
+            <a:r>
+              <a:t>5/10</a:t>
+            </a:r>
+          </a:p>
+        </p:txBody>
+      </p:sp>
+      <p:graphicFrame>
+        <p:nvGraphicFramePr>
+          <p:cNvPr id="6" name="Table 5"/>
+          <p:cNvGraphicFramePr>
+            <a:graphicFrameLocks noGrp="1"/>
+          </p:cNvGraphicFramePr>
+          <p:nvPr/>
+        </p:nvGraphicFramePr>
+        <p:xfrm>
+          <a:off x="640080" y="1554480"/>
+          <a:ext cx="10881360" cy="4114800"/>
+        </p:xfrm>
+        <a:graphic>
+          <a:graphicData uri="http://schemas.openxmlformats.org/drawingml/2006/table">
+            <a:tbl>
+              <a:tblPr firstRow="1" bandRow="1">
+                <a:tableStyleId>{5C22544A-7EE6-4342-B048-85BDC9FD1C3A}</a:tableStyleId>
+              </a:tblPr>
+              <a:tblGrid>
+                <a:gridCol w="3108960"/>
+                <a:gridCol w="1737360"/>
+                <a:gridCol w="6035040"/>
+              </a:tblGrid>
+              <a:tr h="457200">
+                <a:tc>
+                  <a:txBody>
+                    <a:bodyPr wrap="square"/>
+                    <a:lstStyle/>
+                    <a:p>
+                      <a:pPr>
+                        <a:defRPr sz="1400" b="1">
+                          <a:solidFill>
+                            <a:srgbClr val="FFFFFF"/>
+                          </a:solidFill>
+                        </a:defRPr>
+                      </a:pPr>
+                      <a:r>
+                        <a:t>Nodo</a:t>
+                      </a:r>
+                    </a:p>
+                  </a:txBody>
+                  <a:tcPr anchor="ctr">
+                    <a:solidFill>
+                      <a:srgbClr val="142B4D"/>
+                    </a:solidFill>
+                  </a:tcPr>
+                </a:tc>
+                <a:tc>
+                  <a:txBody>
+                    <a:bodyPr wrap="square"/>
+                    <a:lstStyle/>
+                    <a:p>
+                      <a:pPr>
+                        <a:defRPr sz="1400" b="1">
+                          <a:solidFill>
+                            <a:srgbClr val="FFFFFF"/>
+                          </a:solidFill>
+                        </a:defRPr>
+                      </a:pPr>
+                      <a:r>
+                        <a:t>Tipo</a:t>
+                      </a:r>
+                    </a:p>
+                  </a:txBody>
+                  <a:tcPr anchor="ctr">
+                    <a:solidFill>
+                      <a:srgbClr val="142B4D"/>
+                    </a:solidFill>
+                  </a:tcPr>
+                </a:tc>
+                <a:tc>
+                  <a:txBody>
+                    <a:bodyPr wrap="square"/>
+                    <a:lstStyle/>
+                    <a:p>
+                      <a:pPr>
+                        <a:defRPr sz="1400" b="1">
+                          <a:solidFill>
+                            <a:srgbClr val="FFFFFF"/>
+                          </a:solidFill>
+                        </a:defRPr>
+                      </a:pPr>
+                      <a:r>
+                        <a:t>Cosa fa</a:t>
+                      </a:r>
+                    </a:p>
+                  </a:txBody>
+                  <a:tcPr anchor="ctr">
+                    <a:solidFill>
+                      <a:srgbClr val="142B4D"/>
+                    </a:solidFill>
+                  </a:tcPr>
+                </a:tc>
+              </a:tr>
+              <a:tr h="457200">
+                <a:tc>
+                  <a:txBody>
+                    <a:bodyPr wrap="square"/>
+                    <a:lstStyle/>
+                    <a:p>
+                      <a:pPr>
+                        <a:defRPr sz="1300" b="0">
+                          <a:solidFill>
+                            <a:srgbClr val="232323"/>
+                          </a:solidFill>
+                        </a:defRPr>
+                      </a:pPr>
+                      <a:r>
+                        <a:t>1 CONVERTI PDF IN PNG</a:t>
+                      </a:r>
+                    </a:p>
+                  </a:txBody>
+                  <a:tcPr anchor="ctr">
+                    <a:solidFill>
+                      <a:srgbClr val="ECF2F7"/>
+                    </a:solidFill>
+                  </a:tcPr>
+                </a:tc>
+                <a:tc>
+                  <a:txBody>
+                    <a:bodyPr wrap="square"/>
+                    <a:lstStyle/>
+                    <a:p>
+                      <a:pPr>
+                        <a:defRPr sz="1300" b="0">
+                          <a:solidFill>
+                            <a:srgbClr val="232323"/>
+                          </a:solidFill>
+                        </a:defRPr>
+                      </a:pPr>
+                      <a:r>
+                        <a:t>Medex</a:t>
+                      </a:r>
+                    </a:p>
+                  </a:txBody>
+                  <a:tcPr anchor="ctr">
+                    <a:solidFill>
+                      <a:srgbClr val="ECF2F7"/>
+                    </a:solidFill>
+                  </a:tcPr>
+                </a:tc>
+                <a:tc>
+                  <a:txBody>
+                    <a:bodyPr wrap="square"/>
+                    <a:lstStyle/>
+                    <a:p>
+                      <a:pPr>
+                        <a:defRPr sz="1300" b="0">
+                          <a:solidFill>
+                            <a:srgbClr val="232323"/>
+                          </a:solidFill>
+                        </a:defRPr>
+                      </a:pPr>
+                      <a:r>
+                        <a:t>PDF → immagini (nume=5)</a:t>
+                      </a:r>
+                    </a:p>
+                  </a:txBody>
+                  <a:tcPr anchor="ctr">
+                    <a:solidFill>
+                      <a:srgbClr val="ECF2F7"/>
+                    </a:solidFill>
+                  </a:tcPr>
+                </a:tc>
+              </a:tr>
+              <a:tr h="457200">
+                <a:tc>
+                  <a:txBody>
+                    <a:bodyPr wrap="square"/>
+                    <a:lstStyle/>
+                    <a:p>
+                      <a:pPr>
+                        <a:defRPr sz="1300" b="0">
+                          <a:solidFill>
+                            <a:srgbClr val="232323"/>
+                          </a:solidFill>
+                        </a:defRPr>
+                      </a:pPr>
+                      <a:r>
+                        <a:t>2 FINESTRE DI PAGINE</a:t>
+                      </a:r>
+                    </a:p>
+                  </a:txBody>
+                  <a:tcPr anchor="ctr">
+                    <a:solidFill>
+                      <a:srgbClr val="FFFFFF"/>
+                    </a:solidFill>
+                  </a:tcPr>
+                </a:tc>
+                <a:tc>
+                  <a:txBody>
+                    <a:bodyPr wrap="square"/>
+                    <a:lstStyle/>
+                    <a:p>
+                      <a:pPr>
+                        <a:defRPr sz="1300" b="0">
+                          <a:solidFill>
+                            <a:srgbClr val="232323"/>
+                          </a:solidFill>
+                        </a:defRPr>
+                      </a:pPr>
+                      <a:r>
+                        <a:t>Medex</a:t>
+                      </a:r>
+                    </a:p>
+                  </a:txBody>
+                  <a:tcPr anchor="ctr">
+                    <a:solidFill>
+                      <a:srgbClr val="FFFFFF"/>
+                    </a:solidFill>
+                  </a:tcPr>
+                </a:tc>
+                <a:tc>
+                  <a:txBody>
+                    <a:bodyPr wrap="square"/>
+                    <a:lstStyle/>
+                    <a:p>
+                      <a:pPr>
+                        <a:defRPr sz="1300" b="0">
+                          <a:solidFill>
+                            <a:srgbClr val="232323"/>
+                          </a:solidFill>
+                        </a:defRPr>
+                      </a:pPr>
+                      <a:r>
+                        <a:t>14 finestre sovrapposte, ogni pagina 2 volte</a:t>
+                      </a:r>
+                    </a:p>
+                  </a:txBody>
+                  <a:tcPr anchor="ctr">
+                    <a:solidFill>
+                      <a:srgbClr val="FFFFFF"/>
+                    </a:solidFill>
+                  </a:tcPr>
+                </a:tc>
+              </a:tr>
+              <a:tr h="457200">
+                <a:tc>
+                  <a:txBody>
+                    <a:bodyPr wrap="square"/>
+                    <a:lstStyle/>
+                    <a:p>
+                      <a:pPr>
+                        <a:defRPr sz="1300" b="0">
+                          <a:solidFill>
+                            <a:srgbClr val="232323"/>
+                          </a:solidFill>
+                        </a:defRPr>
+                      </a:pPr>
+                      <a:r>
+                        <a:t>3 PAGE CLASSIFIER</a:t>
+                      </a:r>
+                    </a:p>
+                  </a:txBody>
+                  <a:tcPr anchor="ctr">
+                    <a:solidFill>
+                      <a:srgbClr val="ECF2F7"/>
+                    </a:solidFill>
+                  </a:tcPr>
+                </a:tc>
+                <a:tc>
+                  <a:txBody>
+                    <a:bodyPr wrap="square"/>
+                    <a:lstStyle/>
+                    <a:p>
+                      <a:pPr>
+                        <a:defRPr sz="1300" b="0">
+                          <a:solidFill>
+                            <a:srgbClr val="232323"/>
+                          </a:solidFill>
+                        </a:defRPr>
+                      </a:pPr>
+                      <a:r>
+                        <a:t>VLM iterativo</a:t>
+                      </a:r>
+                    </a:p>
+                  </a:txBody>
+                  <a:tcPr anchor="ctr">
+                    <a:solidFill>
+                      <a:srgbClr val="ECF2F7"/>
+                    </a:solidFill>
+                  </a:tcPr>
+                </a:tc>
+                <a:tc>
+                  <a:txBody>
+                    <a:bodyPr wrap="square"/>
+                    <a:lstStyle/>
+                    <a:p>
+                      <a:pPr>
+                        <a:defRPr sz="1300" b="0">
+                          <a:solidFill>
+                            <a:srgbClr val="232323"/>
+                          </a:solidFill>
+                        </a:defRPr>
+                      </a:pPr>
+                      <a:r>
+                        <a:t>Ruolo IOL/JOB + etichetta per finestra</a:t>
+                      </a:r>
+                    </a:p>
+                  </a:txBody>
+                  <a:tcPr anchor="ctr">
+                    <a:solidFill>
+                      <a:srgbClr val="ECF2F7"/>
+                    </a:solidFill>
+                  </a:tcPr>
+                </a:tc>
+              </a:tr>
+              <a:tr h="457200">
+                <a:tc>
+                  <a:txBody>
+                    <a:bodyPr wrap="square"/>
+                    <a:lstStyle/>
+                    <a:p>
+                      <a:pPr>
+                        <a:defRPr sz="1300" b="0">
+                          <a:solidFill>
+                            <a:srgbClr val="232323"/>
+                          </a:solidFill>
+                        </a:defRPr>
+                      </a:pPr>
+                      <a:r>
+                        <a:t>4 DEDUPLICA + 5 PREPARA</a:t>
+                      </a:r>
+                    </a:p>
+                  </a:txBody>
+                  <a:tcPr anchor="ctr">
+                    <a:solidFill>
+                      <a:srgbClr val="FFFFFF"/>
+                    </a:solidFill>
+                  </a:tcPr>
+                </a:tc>
+                <a:tc>
+                  <a:txBody>
+                    <a:bodyPr wrap="square"/>
+                    <a:lstStyle/>
+                    <a:p>
+                      <a:pPr>
+                        <a:defRPr sz="1300" b="0">
+                          <a:solidFill>
+                            <a:srgbClr val="232323"/>
+                          </a:solidFill>
+                        </a:defRPr>
+                      </a:pPr>
+                      <a:r>
+                        <a:t>Pytool</a:t>
+                      </a:r>
+                    </a:p>
+                  </a:txBody>
+                  <a:tcPr anchor="ctr">
+                    <a:solidFill>
+                      <a:srgbClr val="FFFFFF"/>
+                    </a:solidFill>
+                  </a:tcPr>
+                </a:tc>
+                <a:tc>
+                  <a:txBody>
+                    <a:bodyPr wrap="square"/>
+                    <a:lstStyle/>
+                    <a:p>
+                      <a:pPr>
+                        <a:defRPr sz="1300" b="0">
+                          <a:solidFill>
+                            <a:srgbClr val="232323"/>
+                          </a:solidFill>
+                        </a:defRPr>
+                      </a:pPr>
+                      <a:r>
+                        <a:t>14 pagine uniche, array root con review</a:t>
+                      </a:r>
+                    </a:p>
+                  </a:txBody>
+                  <a:tcPr anchor="ctr">
+                    <a:solidFill>
+                      <a:srgbClr val="FFFFFF"/>
+                    </a:solidFill>
+                  </a:tcPr>
+                </a:tc>
+              </a:tr>
+              <a:tr h="457200">
+                <a:tc>
+                  <a:txBody>
+                    <a:bodyPr wrap="square"/>
+                    <a:lstStyle/>
+                    <a:p>
+                      <a:pPr>
+                        <a:defRPr sz="1300" b="0">
+                          <a:solidFill>
+                            <a:srgbClr val="232323"/>
+                          </a:solidFill>
+                        </a:defRPr>
+                      </a:pPr>
+                      <a:r>
+                        <a:t>6 / 7 / 8 FILTRI</a:t>
+                      </a:r>
+                    </a:p>
+                  </a:txBody>
+                  <a:tcPr anchor="ctr">
+                    <a:solidFill>
+                      <a:srgbClr val="ECF2F7"/>
+                    </a:solidFill>
+                  </a:tcPr>
+                </a:tc>
+                <a:tc>
+                  <a:txBody>
+                    <a:bodyPr wrap="square"/>
+                    <a:lstStyle/>
+                    <a:p>
+                      <a:pPr>
+                        <a:defRPr sz="1300" b="0">
+                          <a:solidFill>
+                            <a:srgbClr val="232323"/>
+                          </a:solidFill>
+                        </a:defRPr>
+                      </a:pPr>
+                      <a:r>
+                        <a:t>Pytool</a:t>
+                      </a:r>
+                    </a:p>
+                  </a:txBody>
+                  <a:tcPr anchor="ctr">
+                    <a:solidFill>
+                      <a:srgbClr val="ECF2F7"/>
+                    </a:solidFill>
+                  </a:tcPr>
+                </a:tc>
+                <a:tc>
+                  <a:txBody>
+                    <a:bodyPr wrap="square"/>
+                    <a:lstStyle/>
+                    <a:p>
+                      <a:pPr>
+                        <a:defRPr sz="1300" b="0">
+                          <a:solidFill>
+                            <a:srgbClr val="232323"/>
+                          </a:solidFill>
+                        </a:defRPr>
+                      </a:pPr>
+                      <a:r>
+                        <a:t>Partizione 6 Station · 7 Measurement · 1 Density</a:t>
+                      </a:r>
+                    </a:p>
+                  </a:txBody>
+                  <a:tcPr anchor="ctr">
+                    <a:solidFill>
+                      <a:srgbClr val="ECF2F7"/>
+                    </a:solidFill>
+                  </a:tcPr>
+                </a:tc>
+              </a:tr>
+              <a:tr h="457200">
+                <a:tc>
+                  <a:txBody>
+                    <a:bodyPr wrap="square"/>
+                    <a:lstStyle/>
+                    <a:p>
+                      <a:pPr>
+                        <a:defRPr sz="1300" b="0">
+                          <a:solidFill>
+                            <a:srgbClr val="232323"/>
+                          </a:solidFill>
+                        </a:defRPr>
+                      </a:pPr>
+                      <a:r>
+                        <a:t>10 STATION · 9 MEASURE</a:t>
+                      </a:r>
+                    </a:p>
+                  </a:txBody>
+                  <a:tcPr anchor="ctr">
+                    <a:solidFill>
+                      <a:srgbClr val="FFFFFF"/>
+                    </a:solidFill>
+                  </a:tcPr>
+                </a:tc>
+                <a:tc>
+                  <a:txBody>
+                    <a:bodyPr wrap="square"/>
+                    <a:lstStyle/>
+                    <a:p>
+                      <a:pPr>
+                        <a:defRPr sz="1300" b="0">
+                          <a:solidFill>
+                            <a:srgbClr val="232323"/>
+                          </a:solidFill>
+                        </a:defRPr>
+                      </a:pPr>
+                      <a:r>
+                        <a:t>Iniezioni LV2</a:t>
+                      </a:r>
+                    </a:p>
+                  </a:txBody>
+                  <a:tcPr anchor="ctr">
+                    <a:solidFill>
+                      <a:srgbClr val="FFFFFF"/>
+                    </a:solidFill>
+                  </a:tcPr>
+                </a:tc>
+                <a:tc>
+                  <a:txBody>
+                    <a:bodyPr wrap="square"/>
+                    <a:lstStyle/>
+                    <a:p>
+                      <a:pPr>
+                        <a:defRPr sz="1300" b="0">
+                          <a:solidFill>
+                            <a:srgbClr val="232323"/>
+                          </a:solidFill>
+                        </a:defRPr>
+                      </a:pPr>
+                      <a:r>
+                        <a:t>Estrazione una pagina alla volta</a:t>
+                      </a:r>
+                    </a:p>
+                  </a:txBody>
+                  <a:tcPr anchor="ctr">
+                    <a:solidFill>
+                      <a:srgbClr val="FFFFFF"/>
+                    </a:solidFill>
+                  </a:tcPr>
+                </a:tc>
+              </a:tr>
+              <a:tr h="457200">
+                <a:tc>
+                  <a:txBody>
+                    <a:bodyPr wrap="square"/>
+                    <a:lstStyle/>
+                    <a:p>
+                      <a:pPr>
+                        <a:defRPr sz="1300" b="0">
+                          <a:solidFill>
+                            <a:srgbClr val="232323"/>
+                          </a:solidFill>
+                        </a:defRPr>
+                      </a:pPr>
+                      <a:r>
+                        <a:t>11 PREPARAZIONE X JSON</a:t>
+                      </a:r>
+                    </a:p>
+                  </a:txBody>
+                  <a:tcPr anchor="ctr">
+                    <a:solidFill>
+                      <a:srgbClr val="ECF2F7"/>
+                    </a:solidFill>
+                  </a:tcPr>
+                </a:tc>
+                <a:tc>
+                  <a:txBody>
+                    <a:bodyPr wrap="square"/>
+                    <a:lstStyle/>
+                    <a:p>
+                      <a:pPr>
+                        <a:defRPr sz="1300" b="0">
+                          <a:solidFill>
+                            <a:srgbClr val="232323"/>
+                          </a:solidFill>
+                        </a:defRPr>
+                      </a:pPr>
+                      <a:r>
+                        <a:t>Pytool</a:t>
+                      </a:r>
+                    </a:p>
+                  </a:txBody>
+                  <a:tcPr anchor="ctr">
+                    <a:solidFill>
+                      <a:srgbClr val="ECF2F7"/>
+                    </a:solidFill>
+                  </a:tcPr>
+                </a:tc>
+                <a:tc>
+                  <a:txBody>
+                    <a:bodyPr wrap="square"/>
+                    <a:lstStyle/>
+                    <a:p>
+                      <a:pPr>
+                        <a:defRPr sz="1300" b="0">
+                          <a:solidFill>
+                            <a:srgbClr val="232323"/>
+                          </a:solidFill>
+                        </a:defRPr>
+                      </a:pPr>
+                      <a:r>
+                        <a:t>1 stazione + 69 variabili, review ereditate</a:t>
+                      </a:r>
+                    </a:p>
+                  </a:txBody>
+                  <a:tcPr anchor="ctr">
+                    <a:solidFill>
+                      <a:srgbClr val="ECF2F7"/>
+                    </a:solidFill>
+                  </a:tcPr>
+                </a:tc>
+              </a:tr>
+              <a:tr h="457200">
+                <a:tc>
+                  <a:txBody>
+                    <a:bodyPr wrap="square"/>
+                    <a:lstStyle/>
+                    <a:p>
+                      <a:pPr>
+                        <a:defRPr sz="1300" b="0">
+                          <a:solidFill>
+                            <a:srgbClr val="232323"/>
+                          </a:solidFill>
+                        </a:defRPr>
+                      </a:pPr>
+                      <a:r>
+                        <a:t>12 JSON CREATOR → 13 OUTPUT</a:t>
+                      </a:r>
+                    </a:p>
+                  </a:txBody>
+                  <a:tcPr anchor="ctr">
+                    <a:solidFill>
+                      <a:srgbClr val="FFFFFF"/>
+                    </a:solidFill>
+                  </a:tcPr>
+                </a:tc>
+                <a:tc>
+                  <a:txBody>
+                    <a:bodyPr wrap="square"/>
+                    <a:lstStyle/>
+                    <a:p>
+                      <a:pPr>
+                        <a:defRPr sz="1300" b="0">
+                          <a:solidFill>
+                            <a:srgbClr val="232323"/>
+                          </a:solidFill>
+                        </a:defRPr>
+                      </a:pPr>
+                      <a:r>
+                        <a:t>Pytool + Naive</a:t>
+                      </a:r>
+                    </a:p>
+                  </a:txBody>
+                  <a:tcPr anchor="ctr">
+                    <a:solidFill>
+                      <a:srgbClr val="FFFFFF"/>
+                    </a:solidFill>
+                  </a:tcPr>
+                </a:tc>
+                <a:tc>
+                  <a:txBody>
+                    <a:bodyPr wrap="square"/>
+                    <a:lstStyle/>
+                    <a:p>
+                      <a:pPr>
+                        <a:defRPr sz="1300" b="0">
+                          <a:solidFill>
+                            <a:srgbClr val="232323"/>
+                          </a:solidFill>
+                        </a:defRPr>
+                      </a:pPr>
+                      <a:r>
+                        <a:t>ADAS finale: hex, XML, ID rinumerati</a:t>
+                      </a:r>
+                    </a:p>
+                  </a:txBody>
+                  <a:tcPr anchor="ctr">
+                    <a:solidFill>
+                      <a:srgbClr val="FFFFFF"/>
+                    </a:solidFill>
+                  </a:tcPr>
+                </a:tc>
+              </a:tr>
+            </a:tbl>
+          </a:graphicData>
+        </a:graphic>
+      </p:graphicFrame>
     </p:spTree>
   </p:cSld>
   <p:clrMapOvr>
@@ -4187,7 +6129,7 @@
     <p:bg>
       <p:bgPr>
         <a:solidFill>
-          <a:srgbClr val="FFFFFF"/>
+          <a:srgbClr val="142B4D"/>
         </a:solidFill>
         <a:effectLst/>
       </p:bgPr>
@@ -4208,13 +6150,13 @@
         <p:spPr>
           <a:xfrm>
             <a:off x="0" y="0"/>
-            <a:ext cx="12191695" cy="109728"/>
+            <a:ext cx="12191695" cy="91440"/>
           </a:xfrm>
           <a:prstGeom prst="rect">
             <a:avLst/>
           </a:prstGeom>
           <a:solidFill>
-            <a:srgbClr val="2E86AB"/>
+            <a:srgbClr val="E8A82E"/>
           </a:solidFill>
           <a:ln>
             <a:noFill/>
@@ -4237,7 +6179,7 @@
         <p:spPr>
           <a:xfrm>
             <a:off x="640080" y="320040"/>
-            <a:ext cx="10881360" cy="1005840"/>
+            <a:ext cx="10881360" cy="1051560"/>
           </a:xfrm>
           <a:prstGeom prst="rect">
             <a:avLst/>
@@ -4249,20 +6191,34 @@
             <a:spAutoFit/>
           </a:bodyPr>
           <a:lstStyle/>
-          <a:p/>
           <a:p>
             <a:pPr>
               <a:spcAft>
-                <a:spcPts val="600"/>
+                <a:spcPts val="100"/>
               </a:spcAft>
-              <a:defRPr sz="3400" b="1">
-                <a:solidFill>
-                  <a:srgbClr val="1B2A4A"/>
-                </a:solidFill>
-              </a:defRPr>
-            </a:pPr>
-            <a:r>
-              <a:t>5 · Le tre sotto-piattaforme LV2</a:t>
+              <a:defRPr sz="1300" b="1" i="0">
+                <a:solidFill>
+                  <a:srgbClr val="E8A82E"/>
+                </a:solidFill>
+              </a:defRPr>
+            </a:pPr>
+            <a:r>
+              <a:t>05 · LIVELLO 2</a:t>
+            </a:r>
+          </a:p>
+          <a:p>
+            <a:pPr>
+              <a:spcAft>
+                <a:spcPts val="400"/>
+              </a:spcAft>
+              <a:defRPr sz="3000" b="1" i="0">
+                <a:solidFill>
+                  <a:srgbClr val="FFFFFF"/>
+                </a:solidFill>
+              </a:defRPr>
+            </a:pPr>
+            <a:r>
+              <a:t>Tre sotto-piattaforme</a:t>
             </a:r>
           </a:p>
         </p:txBody>
@@ -4275,8 +6231,8 @@
         </p:nvSpPr>
         <p:spPr>
           <a:xfrm>
-            <a:off x="640080" y="1463040"/>
-            <a:ext cx="10881360" cy="5029200"/>
+            <a:off x="548640" y="6400800"/>
+            <a:ext cx="11064240" cy="274320"/>
           </a:xfrm>
           <a:prstGeom prst="rect">
             <a:avLst/>
@@ -4288,95 +6244,286 @@
             <a:spAutoFit/>
           </a:bodyPr>
           <a:lstStyle/>
-          <a:p/>
           <a:p>
             <a:pPr>
               <a:spcAft>
-                <a:spcPts val="100"/>
+                <a:spcPts val="400"/>
               </a:spcAft>
-              <a:defRPr sz="1900" b="1">
-                <a:solidFill>
-                  <a:srgbClr val="212121"/>
-                </a:solidFill>
-              </a:defRPr>
-            </a:pPr>
-            <a:r>
-              <a:t>▪  Classifier</a:t>
+              <a:defRPr sz="1100" b="0" i="0">
+                <a:solidFill>
+                  <a:srgbClr val="5A6C7D"/>
+                </a:solidFill>
+              </a:defRPr>
+            </a:pPr>
+            <a:r>
+              <a:t>Menerva MAS  ·  Double PDF IOL+JOB  ·  caso 6 JOB.0139.23</a:t>
+            </a:r>
+          </a:p>
+        </p:txBody>
+      </p:sp>
+      <p:sp>
+        <p:nvSpPr>
+          <p:cNvPr id="5" name="TextBox 4"/>
+          <p:cNvSpPr txBox="1"/>
+          <p:nvPr/>
+        </p:nvSpPr>
+        <p:spPr>
+          <a:xfrm>
+            <a:off x="10972800" y="6400800"/>
+            <a:ext cx="640080" cy="274320"/>
+          </a:xfrm>
+          <a:prstGeom prst="rect">
+            <a:avLst/>
+          </a:prstGeom>
+          <a:noFill/>
+        </p:spPr>
+        <p:txBody>
+          <a:bodyPr wrap="none">
+            <a:spAutoFit/>
+          </a:bodyPr>
+          <a:lstStyle/>
+          <a:p>
+            <a:pPr algn="r">
+              <a:spcAft>
+                <a:spcPts val="400"/>
+              </a:spcAft>
+              <a:defRPr sz="1100" b="0" i="0">
+                <a:solidFill>
+                  <a:srgbClr val="5A6C7D"/>
+                </a:solidFill>
+              </a:defRPr>
+            </a:pPr>
+            <a:r>
+              <a:t>6/10</a:t>
+            </a:r>
+          </a:p>
+        </p:txBody>
+      </p:sp>
+      <p:sp>
+        <p:nvSpPr>
+          <p:cNvPr id="6" name="Rounded Rectangle 5"/>
+          <p:cNvSpPr/>
+          <p:nvPr/>
+        </p:nvSpPr>
+        <p:spPr>
+          <a:xfrm>
+            <a:off x="640080" y="1737360"/>
+            <a:ext cx="3383280" cy="4206240"/>
+          </a:xfrm>
+          <a:prstGeom prst="roundRect">
+            <a:avLst/>
+          </a:prstGeom>
+          <a:solidFill>
+            <a:srgbClr val="FFFFFF"/>
+          </a:solidFill>
+          <a:ln>
+            <a:noFill/>
+          </a:ln>
+          <a:effectLst/>
+        </p:spPr>
+        <p:style>
+          <a:lnRef idx="1">
+            <a:schemeClr val="accent1"/>
+          </a:lnRef>
+          <a:fillRef idx="3">
+            <a:schemeClr val="accent1"/>
+          </a:fillRef>
+          <a:effectRef idx="2">
+            <a:schemeClr val="accent1"/>
+          </a:effectRef>
+          <a:fontRef idx="minor">
+            <a:schemeClr val="lt1"/>
+          </a:fontRef>
+        </p:style>
+        <p:txBody>
+          <a:bodyPr rtlCol="0" anchor="ctr" wrap="square" lIns="201168" rIns="201168" tIns="128016"/>
+          <a:lstStyle/>
+          <a:p>
+            <a:pPr algn="ctr">
+              <a:spcAft>
+                <a:spcPts val="400"/>
+              </a:spcAft>
+              <a:defRPr sz="1700" b="1" i="0">
+                <a:solidFill>
+                  <a:srgbClr val="142B4D"/>
+                </a:solidFill>
+              </a:defRPr>
+            </a:pPr>
+            <a:r>
+              <a:t>◉ Classifier</a:t>
             </a:r>
           </a:p>
           <a:p>
             <a:pPr>
               <a:spcAft>
-                <a:spcPts val="1000"/>
+                <a:spcPts val="400"/>
               </a:spcAft>
-              <a:defRPr sz="1600" b="0">
-                <a:solidFill>
-                  <a:srgbClr val="444444"/>
-                </a:solidFill>
-              </a:defRPr>
-            </a:pPr>
-            <a:r>
-              <a:t>     Medex + VLM; il routing usa la label, il ruolo resta metadato.</a:t>
+              <a:defRPr sz="1400" b="0" i="0">
+                <a:solidFill>
+                  <a:srgbClr val="5A6C7D"/>
+                </a:solidFill>
+              </a:defRPr>
+            </a:pPr>
+            <a:r>
+              <a:t>Medex + VLM con prompt dedicato.</a:t>
+            </a:r>
+            <a:br/>
+            <a:r>
+              <a:t>Il routing usa la label, il ruolo resta metadato.</a:t>
+            </a:r>
+            <a:br/>
+            <a:r>
+              <a:t>Mai dedurre il PDF dal prefisso chiave.</a:t>
+            </a:r>
+          </a:p>
+        </p:txBody>
+      </p:sp>
+      <p:sp>
+        <p:nvSpPr>
+          <p:cNvPr id="7" name="Rounded Rectangle 6"/>
+          <p:cNvSpPr/>
+          <p:nvPr/>
+        </p:nvSpPr>
+        <p:spPr>
+          <a:xfrm>
+            <a:off x="4389120" y="1737360"/>
+            <a:ext cx="3383280" cy="4206240"/>
+          </a:xfrm>
+          <a:prstGeom prst="roundRect">
+            <a:avLst/>
+          </a:prstGeom>
+          <a:solidFill>
+            <a:srgbClr val="FFFFFF"/>
+          </a:solidFill>
+          <a:ln>
+            <a:noFill/>
+          </a:ln>
+          <a:effectLst/>
+        </p:spPr>
+        <p:style>
+          <a:lnRef idx="1">
+            <a:schemeClr val="accent1"/>
+          </a:lnRef>
+          <a:fillRef idx="3">
+            <a:schemeClr val="accent1"/>
+          </a:fillRef>
+          <a:effectRef idx="2">
+            <a:schemeClr val="accent1"/>
+          </a:effectRef>
+          <a:fontRef idx="minor">
+            <a:schemeClr val="lt1"/>
+          </a:fontRef>
+        </p:style>
+        <p:txBody>
+          <a:bodyPr rtlCol="0" anchor="ctr" wrap="square" lIns="201168" rIns="201168" tIns="128016"/>
+          <a:lstStyle/>
+          <a:p>
+            <a:pPr algn="ctr">
+              <a:spcAft>
+                <a:spcPts val="400"/>
+              </a:spcAft>
+              <a:defRPr sz="1700" b="1" i="0">
+                <a:solidFill>
+                  <a:srgbClr val="142B4D"/>
+                </a:solidFill>
+              </a:defRPr>
+            </a:pPr>
+            <a:r>
+              <a:t>◉ Station (6 pp.)</a:t>
             </a:r>
           </a:p>
           <a:p>
             <a:pPr>
               <a:spcAft>
-                <a:spcPts val="100"/>
+                <a:spcPts val="400"/>
               </a:spcAft>
-              <a:defRPr sz="1900" b="1">
-                <a:solidFill>
-                  <a:srgbClr val="212121"/>
-                </a:solidFill>
-              </a:defRPr>
-            </a:pPr>
-            <a:r>
-              <a:t>▪  Station</a:t>
+              <a:defRPr sz="1400" b="0" i="0">
+                <a:solidFill>
+                  <a:srgbClr val="5A6C7D"/>
+                </a:solidFill>
+              </a:defRPr>
+            </a:pPr>
+            <a:r>
+              <a:t>Chiave → immagine → VLM v5 (niente SME inventato) → associatore.</a:t>
+            </a:r>
+            <a:br/>
+            <a:r>
+              <a:t>Risultato: 10.100.50.95:511, scale SO₂ 0–300 / TF 0–100.</a:t>
+            </a:r>
+          </a:p>
+        </p:txBody>
+      </p:sp>
+      <p:sp>
+        <p:nvSpPr>
+          <p:cNvPr id="8" name="Rounded Rectangle 7"/>
+          <p:cNvSpPr/>
+          <p:nvPr/>
+        </p:nvSpPr>
+        <p:spPr>
+          <a:xfrm>
+            <a:off x="8138160" y="1737360"/>
+            <a:ext cx="3383280" cy="4206240"/>
+          </a:xfrm>
+          <a:prstGeom prst="roundRect">
+            <a:avLst/>
+          </a:prstGeom>
+          <a:solidFill>
+            <a:srgbClr val="FFFFFF"/>
+          </a:solidFill>
+          <a:ln>
+            <a:noFill/>
+          </a:ln>
+          <a:effectLst/>
+        </p:spPr>
+        <p:style>
+          <a:lnRef idx="1">
+            <a:schemeClr val="accent1"/>
+          </a:lnRef>
+          <a:fillRef idx="3">
+            <a:schemeClr val="accent1"/>
+          </a:fillRef>
+          <a:effectRef idx="2">
+            <a:schemeClr val="accent1"/>
+          </a:effectRef>
+          <a:fontRef idx="minor">
+            <a:schemeClr val="lt1"/>
+          </a:fontRef>
+        </p:style>
+        <p:txBody>
+          <a:bodyPr rtlCol="0" anchor="ctr" wrap="square" lIns="201168" rIns="201168" tIns="128016"/>
+          <a:lstStyle/>
+          <a:p>
+            <a:pPr algn="ctr">
+              <a:spcAft>
+                <a:spcPts val="400"/>
+              </a:spcAft>
+              <a:defRPr sz="1700" b="1" i="0">
+                <a:solidFill>
+                  <a:srgbClr val="142B4D"/>
+                </a:solidFill>
+              </a:defRPr>
+            </a:pPr>
+            <a:r>
+              <a:t>◉ Measurement (7 pp.)</a:t>
             </a:r>
           </a:p>
           <a:p>
             <a:pPr>
               <a:spcAft>
-                <a:spcPts val="1000"/>
+                <a:spcPts val="400"/>
               </a:spcAft>
-              <a:defRPr sz="1600" b="0">
-                <a:solidFill>
-                  <a:srgbClr val="444444"/>
-                </a:solidFill>
-              </a:defRPr>
-            </a:pPr>
-            <a:r>
-              <a:t>     Chiave → immagine → VLM v4 (niente SME inventato) → associatore. Dà IP, porta, scale.</a:t>
-            </a:r>
-          </a:p>
-          <a:p>
-            <a:pPr>
-              <a:spcAft>
-                <a:spcPts val="100"/>
-              </a:spcAft>
-              <a:defRPr sz="1900" b="1">
-                <a:solidFill>
-                  <a:srgbClr val="212121"/>
-                </a:solidFill>
-              </a:defRPr>
-            </a:pPr>
-            <a:r>
-              <a:t>▪  Measurement</a:t>
-            </a:r>
-          </a:p>
-          <a:p>
-            <a:pPr>
-              <a:spcAft>
-                <a:spcPts val="1000"/>
-              </a:spcAft>
-              <a:defRPr sz="1600" b="0">
-                <a:solidFill>
-                  <a:srgbClr val="444444"/>
-                </a:solidFill>
-              </a:defRPr>
-            </a:pPr>
-            <a:r>
-              <a:t>     3 VLM paralleli → 3 tagger (ramo+pagina, fence gestite) → assemblatore per pagina.</a:t>
+              <a:defRPr sz="1400" b="0" i="0">
+                <a:solidFill>
+                  <a:srgbClr val="5A6C7D"/>
+                </a:solidFill>
+              </a:defRPr>
+            </a:pPr>
+            <a:r>
+              <a:t>3 VLM paralleli → 3 tagger (ramo+pagina) → assemblatore.</a:t>
+            </a:r>
+            <a:br/>
+            <a:r>
+              <a:t>Join su nome, BIT dal ramo misure, scarti tracciati.</a:t>
             </a:r>
           </a:p>
         </p:txBody>
@@ -4416,7 +6563,7 @@
         <p:spPr>
           <a:xfrm>
             <a:off x="0" y="0"/>
-            <a:ext cx="12191695" cy="109728"/>
+            <a:ext cx="12191695" cy="91440"/>
           </a:xfrm>
           <a:prstGeom prst="rect">
             <a:avLst/>
@@ -4445,7 +6592,7 @@
         <p:spPr>
           <a:xfrm>
             <a:off x="640080" y="320040"/>
-            <a:ext cx="10881360" cy="1005840"/>
+            <a:ext cx="10881360" cy="1051560"/>
           </a:xfrm>
           <a:prstGeom prst="rect">
             <a:avLst/>
@@ -4457,20 +6604,34 @@
             <a:spAutoFit/>
           </a:bodyPr>
           <a:lstStyle/>
-          <a:p/>
           <a:p>
             <a:pPr>
               <a:spcAft>
-                <a:spcPts val="600"/>
+                <a:spcPts val="100"/>
               </a:spcAft>
-              <a:defRPr sz="3400" b="1">
-                <a:solidFill>
-                  <a:srgbClr val="1B2A4A"/>
-                </a:solidFill>
-              </a:defRPr>
-            </a:pPr>
-            <a:r>
-              <a:t>6 · Le regole d'oro</a:t>
+              <a:defRPr sz="1300" b="1" i="0">
+                <a:solidFill>
+                  <a:srgbClr val="2E86AB"/>
+                </a:solidFill>
+              </a:defRPr>
+            </a:pPr>
+            <a:r>
+              <a:t>06 · REGOLE D'ORO</a:t>
+            </a:r>
+          </a:p>
+          <a:p>
+            <a:pPr>
+              <a:spcAft>
+                <a:spcPts val="400"/>
+              </a:spcAft>
+              <a:defRPr sz="3000" b="1" i="0">
+                <a:solidFill>
+                  <a:srgbClr val="142B4D"/>
+                </a:solidFill>
+              </a:defRPr>
+            </a:pPr>
+            <a:r>
+              <a:t>Perché fidarsi dell'output</a:t>
             </a:r>
           </a:p>
         </p:txBody>
@@ -4483,8 +6644,8 @@
         </p:nvSpPr>
         <p:spPr>
           <a:xfrm>
-            <a:off x="640080" y="1463040"/>
-            <a:ext cx="10881360" cy="5029200"/>
+            <a:off x="548640" y="6400800"/>
+            <a:ext cx="11064240" cy="274320"/>
           </a:xfrm>
           <a:prstGeom prst="rect">
             <a:avLst/>
@@ -4496,155 +6657,507 @@
             <a:spAutoFit/>
           </a:bodyPr>
           <a:lstStyle/>
-          <a:p/>
           <a:p>
             <a:pPr>
               <a:spcAft>
-                <a:spcPts val="100"/>
+                <a:spcPts val="400"/>
               </a:spcAft>
-              <a:defRPr sz="1900" b="1">
-                <a:solidFill>
-                  <a:srgbClr val="212121"/>
-                </a:solidFill>
-              </a:defRPr>
-            </a:pPr>
-            <a:r>
-              <a:t>▪  Join su nome, mai su ID</a:t>
-            </a:r>
-          </a:p>
+              <a:defRPr sz="1100" b="0" i="0">
+                <a:solidFill>
+                  <a:srgbClr val="5A6C7D"/>
+                </a:solidFill>
+              </a:defRPr>
+            </a:pPr>
+            <a:r>
+              <a:t>Menerva MAS  ·  Double PDF IOL+JOB  ·  caso 6 JOB.0139.23</a:t>
+            </a:r>
+          </a:p>
+        </p:txBody>
+      </p:sp>
+      <p:sp>
+        <p:nvSpPr>
+          <p:cNvPr id="5" name="TextBox 4"/>
+          <p:cNvSpPr txBox="1"/>
+          <p:nvPr/>
+        </p:nvSpPr>
+        <p:spPr>
+          <a:xfrm>
+            <a:off x="10972800" y="6400800"/>
+            <a:ext cx="640080" cy="274320"/>
+          </a:xfrm>
+          <a:prstGeom prst="rect">
+            <a:avLst/>
+          </a:prstGeom>
+          <a:noFill/>
+        </p:spPr>
+        <p:txBody>
+          <a:bodyPr wrap="none">
+            <a:spAutoFit/>
+          </a:bodyPr>
+          <a:lstStyle/>
+          <a:p>
+            <a:pPr algn="r">
+              <a:spcAft>
+                <a:spcPts val="400"/>
+              </a:spcAft>
+              <a:defRPr sz="1100" b="0" i="0">
+                <a:solidFill>
+                  <a:srgbClr val="5A6C7D"/>
+                </a:solidFill>
+              </a:defRPr>
+            </a:pPr>
+            <a:r>
+              <a:t>7/10</a:t>
+            </a:r>
+          </a:p>
+        </p:txBody>
+      </p:sp>
+      <p:sp>
+        <p:nvSpPr>
+          <p:cNvPr id="6" name="Oval 5"/>
+          <p:cNvSpPr/>
+          <p:nvPr/>
+        </p:nvSpPr>
+        <p:spPr>
+          <a:xfrm>
+            <a:off x="822960" y="1600200"/>
+            <a:ext cx="502920" cy="502920"/>
+          </a:xfrm>
+          <a:prstGeom prst="ellipse">
+            <a:avLst/>
+          </a:prstGeom>
+          <a:solidFill>
+            <a:srgbClr val="E8A82E"/>
+          </a:solidFill>
+          <a:ln>
+            <a:noFill/>
+          </a:ln>
+        </p:spPr>
+        <p:style>
+          <a:lnRef idx="1">
+            <a:schemeClr val="accent1"/>
+          </a:lnRef>
+          <a:fillRef idx="3">
+            <a:schemeClr val="accent1"/>
+          </a:fillRef>
+          <a:effectRef idx="2">
+            <a:schemeClr val="accent1"/>
+          </a:effectRef>
+          <a:fontRef idx="minor">
+            <a:schemeClr val="lt1"/>
+          </a:fontRef>
+        </p:style>
+        <p:txBody>
+          <a:bodyPr rtlCol="0" anchor="ctr" wrap="square"/>
+          <a:lstStyle/>
+          <a:p>
+            <a:pPr algn="ctr">
+              <a:defRPr sz="2000" b="1">
+                <a:solidFill>
+                  <a:srgbClr val="FFFFFF"/>
+                </a:solidFill>
+              </a:defRPr>
+            </a:pPr>
+            <a:r>
+              <a:t>1</a:t>
+            </a:r>
+          </a:p>
+        </p:txBody>
+      </p:sp>
+      <p:sp>
+        <p:nvSpPr>
+          <p:cNvPr id="7" name="TextBox 6"/>
+          <p:cNvSpPr txBox="1"/>
+          <p:nvPr/>
+        </p:nvSpPr>
+        <p:spPr>
+          <a:xfrm>
+            <a:off x="1554480" y="1554480"/>
+            <a:ext cx="10058400" cy="914400"/>
+          </a:xfrm>
+          <a:prstGeom prst="rect">
+            <a:avLst/>
+          </a:prstGeom>
+          <a:noFill/>
+        </p:spPr>
+        <p:txBody>
+          <a:bodyPr wrap="square">
+            <a:spAutoFit/>
+          </a:bodyPr>
+          <a:lstStyle/>
           <a:p>
             <a:pPr>
               <a:spcAft>
-                <a:spcPts val="1000"/>
+                <a:spcPts val="400"/>
               </a:spcAft>
-              <a:defRPr sz="1600" b="0">
-                <a:solidFill>
-                  <a:srgbClr val="444444"/>
-                </a:solidFill>
-              </a:defRPr>
-            </a:pPr>
-            <a:r>
-              <a:t>     Il MEASUREID ha 3 semantiche diverse: usarlo corrompe il join.</a:t>
-            </a:r>
-          </a:p>
+              <a:defRPr sz="1600" b="0" i="0">
+                <a:solidFill>
+                  <a:srgbClr val="232323"/>
+                </a:solidFill>
+              </a:defRPr>
+            </a:pPr>
+            <a:r>
+              <a:t>Join su nome, mai su ID  —  Il MEASUREID ha 3 semantiche diverse: usarlo corrompe il join.</a:t>
+            </a:r>
+          </a:p>
+        </p:txBody>
+      </p:sp>
+      <p:sp>
+        <p:nvSpPr>
+          <p:cNvPr id="8" name="Oval 7"/>
+          <p:cNvSpPr/>
+          <p:nvPr/>
+        </p:nvSpPr>
+        <p:spPr>
+          <a:xfrm>
+            <a:off x="822960" y="2587752"/>
+            <a:ext cx="502920" cy="502920"/>
+          </a:xfrm>
+          <a:prstGeom prst="ellipse">
+            <a:avLst/>
+          </a:prstGeom>
+          <a:solidFill>
+            <a:srgbClr val="2E86AB"/>
+          </a:solidFill>
+          <a:ln>
+            <a:noFill/>
+          </a:ln>
+        </p:spPr>
+        <p:style>
+          <a:lnRef idx="1">
+            <a:schemeClr val="accent1"/>
+          </a:lnRef>
+          <a:fillRef idx="3">
+            <a:schemeClr val="accent1"/>
+          </a:fillRef>
+          <a:effectRef idx="2">
+            <a:schemeClr val="accent1"/>
+          </a:effectRef>
+          <a:fontRef idx="minor">
+            <a:schemeClr val="lt1"/>
+          </a:fontRef>
+        </p:style>
+        <p:txBody>
+          <a:bodyPr rtlCol="0" anchor="ctr" wrap="square"/>
+          <a:lstStyle/>
+          <a:p>
+            <a:pPr algn="ctr">
+              <a:defRPr sz="2000" b="1">
+                <a:solidFill>
+                  <a:srgbClr val="FFFFFF"/>
+                </a:solidFill>
+              </a:defRPr>
+            </a:pPr>
+            <a:r>
+              <a:t>2</a:t>
+            </a:r>
+          </a:p>
+        </p:txBody>
+      </p:sp>
+      <p:sp>
+        <p:nvSpPr>
+          <p:cNvPr id="9" name="TextBox 8"/>
+          <p:cNvSpPr txBox="1"/>
+          <p:nvPr/>
+        </p:nvSpPr>
+        <p:spPr>
+          <a:xfrm>
+            <a:off x="1554480" y="2542032"/>
+            <a:ext cx="10058400" cy="914400"/>
+          </a:xfrm>
+          <a:prstGeom prst="rect">
+            <a:avLst/>
+          </a:prstGeom>
+          <a:noFill/>
+        </p:spPr>
+        <p:txBody>
+          <a:bodyPr wrap="square">
+            <a:spAutoFit/>
+          </a:bodyPr>
+          <a:lstStyle/>
           <a:p>
             <a:pPr>
               <a:spcAft>
-                <a:spcPts val="100"/>
+                <a:spcPts val="400"/>
               </a:spcAft>
-              <a:defRPr sz="1900" b="1">
-                <a:solidFill>
-                  <a:srgbClr val="212121"/>
-                </a:solidFill>
-              </a:defRPr>
-            </a:pPr>
-            <a:r>
-              <a:t>▪  BIT dal ramo misure</a:t>
-            </a:r>
-          </a:p>
+              <a:defRPr sz="1600" b="0" i="0">
+                <a:solidFill>
+                  <a:srgbClr val="232323"/>
+                </a:solidFill>
+              </a:defRPr>
+            </a:pPr>
+            <a:r>
+              <a:t>BIT dal ramo misure  —  Verificato 6/6 da coordinate PDF; i disaccordi vanno in review (PM-302A/B).</a:t>
+            </a:r>
+          </a:p>
+        </p:txBody>
+      </p:sp>
+      <p:sp>
+        <p:nvSpPr>
+          <p:cNvPr id="10" name="Oval 9"/>
+          <p:cNvSpPr/>
+          <p:nvPr/>
+        </p:nvSpPr>
+        <p:spPr>
+          <a:xfrm>
+            <a:off x="822960" y="3575304"/>
+            <a:ext cx="502920" cy="502920"/>
+          </a:xfrm>
+          <a:prstGeom prst="ellipse">
+            <a:avLst/>
+          </a:prstGeom>
+          <a:solidFill>
+            <a:srgbClr val="2E86AB"/>
+          </a:solidFill>
+          <a:ln>
+            <a:noFill/>
+          </a:ln>
+        </p:spPr>
+        <p:style>
+          <a:lnRef idx="1">
+            <a:schemeClr val="accent1"/>
+          </a:lnRef>
+          <a:fillRef idx="3">
+            <a:schemeClr val="accent1"/>
+          </a:fillRef>
+          <a:effectRef idx="2">
+            <a:schemeClr val="accent1"/>
+          </a:effectRef>
+          <a:fontRef idx="minor">
+            <a:schemeClr val="lt1"/>
+          </a:fontRef>
+        </p:style>
+        <p:txBody>
+          <a:bodyPr rtlCol="0" anchor="ctr" wrap="square"/>
+          <a:lstStyle/>
+          <a:p>
+            <a:pPr algn="ctr">
+              <a:defRPr sz="2000" b="1">
+                <a:solidFill>
+                  <a:srgbClr val="FFFFFF"/>
+                </a:solidFill>
+              </a:defRPr>
+            </a:pPr>
+            <a:r>
+              <a:t>3</a:t>
+            </a:r>
+          </a:p>
+        </p:txBody>
+      </p:sp>
+      <p:sp>
+        <p:nvSpPr>
+          <p:cNvPr id="11" name="TextBox 10"/>
+          <p:cNvSpPr txBox="1"/>
+          <p:nvPr/>
+        </p:nvSpPr>
+        <p:spPr>
+          <a:xfrm>
+            <a:off x="1554480" y="3529584"/>
+            <a:ext cx="10058400" cy="914400"/>
+          </a:xfrm>
+          <a:prstGeom prst="rect">
+            <a:avLst/>
+          </a:prstGeom>
+          <a:noFill/>
+        </p:spPr>
+        <p:txBody>
+          <a:bodyPr wrap="square">
+            <a:spAutoFit/>
+          </a:bodyPr>
+          <a:lstStyle/>
           <a:p>
             <a:pPr>
               <a:spcAft>
-                <a:spcPts val="1000"/>
+                <a:spcPts val="400"/>
               </a:spcAft>
-              <a:defRPr sz="1600" b="0">
-                <a:solidFill>
-                  <a:srgbClr val="444444"/>
-                </a:solidFill>
-              </a:defRPr>
-            </a:pPr>
-            <a:r>
-              <a:t>     Verificato 6/6 da coordinate PDF; discordie in review (PM-302A/B).</a:t>
-            </a:r>
-          </a:p>
+              <a:defRPr sz="1600" b="0" i="0">
+                <a:solidFill>
+                  <a:srgbClr val="232323"/>
+                </a:solidFill>
+              </a:defRPr>
+            </a:pPr>
+            <a:r>
+              <a:t>Righe bianche = saltate  —  Riserve 420–424 e filler mai inventati (il legacy creava «Comando riservato»).</a:t>
+            </a:r>
+          </a:p>
+        </p:txBody>
+      </p:sp>
+      <p:sp>
+        <p:nvSpPr>
+          <p:cNvPr id="12" name="Oval 11"/>
+          <p:cNvSpPr/>
+          <p:nvPr/>
+        </p:nvSpPr>
+        <p:spPr>
+          <a:xfrm>
+            <a:off x="822960" y="4562856"/>
+            <a:ext cx="502920" cy="502920"/>
+          </a:xfrm>
+          <a:prstGeom prst="ellipse">
+            <a:avLst/>
+          </a:prstGeom>
+          <a:solidFill>
+            <a:srgbClr val="2E86AB"/>
+          </a:solidFill>
+          <a:ln>
+            <a:noFill/>
+          </a:ln>
+        </p:spPr>
+        <p:style>
+          <a:lnRef idx="1">
+            <a:schemeClr val="accent1"/>
+          </a:lnRef>
+          <a:fillRef idx="3">
+            <a:schemeClr val="accent1"/>
+          </a:fillRef>
+          <a:effectRef idx="2">
+            <a:schemeClr val="accent1"/>
+          </a:effectRef>
+          <a:fontRef idx="minor">
+            <a:schemeClr val="lt1"/>
+          </a:fontRef>
+        </p:style>
+        <p:txBody>
+          <a:bodyPr rtlCol="0" anchor="ctr" wrap="square"/>
+          <a:lstStyle/>
+          <a:p>
+            <a:pPr algn="ctr">
+              <a:defRPr sz="2000" b="1">
+                <a:solidFill>
+                  <a:srgbClr val="FFFFFF"/>
+                </a:solidFill>
+              </a:defRPr>
+            </a:pPr>
+            <a:r>
+              <a:t>4</a:t>
+            </a:r>
+          </a:p>
+        </p:txBody>
+      </p:sp>
+      <p:sp>
+        <p:nvSpPr>
+          <p:cNvPr id="13" name="TextBox 12"/>
+          <p:cNvSpPr txBox="1"/>
+          <p:nvPr/>
+        </p:nvSpPr>
+        <p:spPr>
+          <a:xfrm>
+            <a:off x="1554480" y="4517136"/>
+            <a:ext cx="10058400" cy="914400"/>
+          </a:xfrm>
+          <a:prstGeom prst="rect">
+            <a:avLst/>
+          </a:prstGeom>
+          <a:noFill/>
+        </p:spPr>
+        <p:txBody>
+          <a:bodyPr wrap="square">
+            <a:spAutoFit/>
+          </a:bodyPr>
+          <a:lstStyle/>
           <a:p>
             <a:pPr>
               <a:spcAft>
-                <a:spcPts val="100"/>
+                <a:spcPts val="400"/>
               </a:spcAft>
-              <a:defRPr sz="1900" b="1">
-                <a:solidFill>
-                  <a:srgbClr val="212121"/>
-                </a:solidFill>
-              </a:defRPr>
-            </a:pPr>
-            <a:r>
-              <a:t>▪  Righe bianche = saltate</a:t>
-            </a:r>
-          </a:p>
+              <a:defRPr sz="1600" b="0" i="0">
+                <a:solidFill>
+                  <a:srgbClr val="232323"/>
+                </a:solidFill>
+              </a:defRPr>
+            </a:pPr>
+            <a:r>
+              <a:t>TEXTON derivati, non letti  —  Nel PDF non esiste colonna di stato: convenzione valida, dato sintetico.</a:t>
+            </a:r>
+          </a:p>
+        </p:txBody>
+      </p:sp>
+      <p:sp>
+        <p:nvSpPr>
+          <p:cNvPr id="14" name="Oval 13"/>
+          <p:cNvSpPr/>
+          <p:nvPr/>
+        </p:nvSpPr>
+        <p:spPr>
+          <a:xfrm>
+            <a:off x="822960" y="5550408"/>
+            <a:ext cx="502920" cy="502920"/>
+          </a:xfrm>
+          <a:prstGeom prst="ellipse">
+            <a:avLst/>
+          </a:prstGeom>
+          <a:solidFill>
+            <a:srgbClr val="2E86AB"/>
+          </a:solidFill>
+          <a:ln>
+            <a:noFill/>
+          </a:ln>
+        </p:spPr>
+        <p:style>
+          <a:lnRef idx="1">
+            <a:schemeClr val="accent1"/>
+          </a:lnRef>
+          <a:fillRef idx="3">
+            <a:schemeClr val="accent1"/>
+          </a:fillRef>
+          <a:effectRef idx="2">
+            <a:schemeClr val="accent1"/>
+          </a:effectRef>
+          <a:fontRef idx="minor">
+            <a:schemeClr val="lt1"/>
+          </a:fontRef>
+        </p:style>
+        <p:txBody>
+          <a:bodyPr rtlCol="0" anchor="ctr" wrap="square"/>
+          <a:lstStyle/>
+          <a:p>
+            <a:pPr algn="ctr">
+              <a:defRPr sz="2000" b="1">
+                <a:solidFill>
+                  <a:srgbClr val="FFFFFF"/>
+                </a:solidFill>
+              </a:defRPr>
+            </a:pPr>
+            <a:r>
+              <a:t>5</a:t>
+            </a:r>
+          </a:p>
+        </p:txBody>
+      </p:sp>
+      <p:sp>
+        <p:nvSpPr>
+          <p:cNvPr id="15" name="TextBox 14"/>
+          <p:cNvSpPr txBox="1"/>
+          <p:nvPr/>
+        </p:nvSpPr>
+        <p:spPr>
+          <a:xfrm>
+            <a:off x="1554480" y="5504688"/>
+            <a:ext cx="10058400" cy="914400"/>
+          </a:xfrm>
+          <a:prstGeom prst="rect">
+            <a:avLst/>
+          </a:prstGeom>
+          <a:noFill/>
+        </p:spPr>
+        <p:txBody>
+          <a:bodyPr wrap="square">
+            <a:spAutoFit/>
+          </a:bodyPr>
+          <a:lstStyle/>
           <a:p>
             <a:pPr>
               <a:spcAft>
-                <a:spcPts val="1000"/>
+                <a:spcPts val="400"/>
               </a:spcAft>
-              <a:defRPr sz="1600" b="0">
-                <a:solidFill>
-                  <a:srgbClr val="444444"/>
-                </a:solidFill>
-              </a:defRPr>
-            </a:pPr>
-            <a:r>
-              <a:t>     Riserve 420–424 e filler mai inventati (il legacy creava «Comando riservato»).</a:t>
-            </a:r>
-          </a:p>
-          <a:p>
-            <a:pPr>
-              <a:spcAft>
-                <a:spcPts val="100"/>
-              </a:spcAft>
-              <a:defRPr sz="1900" b="1">
-                <a:solidFill>
-                  <a:srgbClr val="212121"/>
-                </a:solidFill>
-              </a:defRPr>
-            </a:pPr>
-            <a:r>
-              <a:t>▪  TEXTON derivati, non letti</a:t>
-            </a:r>
-          </a:p>
-          <a:p>
-            <a:pPr>
-              <a:spcAft>
-                <a:spcPts val="1000"/>
-              </a:spcAft>
-              <a:defRPr sz="1600" b="0">
-                <a:solidFill>
-                  <a:srgbClr val="444444"/>
-                </a:solidFill>
-              </a:defRPr>
-            </a:pPr>
-            <a:r>
-              <a:t>     Nel PDF non esiste colonna di stato: convenzione valida, dato sintetico.</a:t>
-            </a:r>
-          </a:p>
-          <a:p>
-            <a:pPr>
-              <a:spcAft>
-                <a:spcPts val="100"/>
-              </a:spcAft>
-              <a:defRPr sz="1900" b="1">
-                <a:solidFill>
-                  <a:srgbClr val="212121"/>
-                </a:solidFill>
-              </a:defRPr>
-            </a:pPr>
-            <a:r>
-              <a:t>▪  Leggero = plumbing, 3.8 = qualità</a:t>
-            </a:r>
-          </a:p>
-          <a:p>
-            <a:pPr>
-              <a:spcAft>
-                <a:spcPts val="1000"/>
-              </a:spcAft>
-              <a:defRPr sz="1600" b="0">
-                <a:solidFill>
-                  <a:srgbClr val="444444"/>
-                </a:solidFill>
-              </a:defRPr>
-            </a:pPr>
-            <a:r>
-              <a:t>     Confronti solo a parità di modello e classificazione.</a:t>
+              <a:defRPr sz="1600" b="0" i="0">
+                <a:solidFill>
+                  <a:srgbClr val="232323"/>
+                </a:solidFill>
+              </a:defRPr>
+            </a:pPr>
+            <a:r>
+              <a:t>3.6 = plumbing, 3.8 = qualità  —  Confronti solo a parità di modello e classificazione.</a:t>
             </a:r>
           </a:p>
         </p:txBody>
@@ -4663,7 +7176,7 @@
     <p:bg>
       <p:bgPr>
         <a:solidFill>
-          <a:srgbClr val="FFFFFF"/>
+          <a:srgbClr val="142B4D"/>
         </a:solidFill>
         <a:effectLst/>
       </p:bgPr>
@@ -4684,13 +7197,13 @@
         <p:spPr>
           <a:xfrm>
             <a:off x="0" y="0"/>
-            <a:ext cx="12191695" cy="109728"/>
+            <a:ext cx="12191695" cy="91440"/>
           </a:xfrm>
           <a:prstGeom prst="rect">
             <a:avLst/>
           </a:prstGeom>
           <a:solidFill>
-            <a:srgbClr val="2E86AB"/>
+            <a:srgbClr val="E8A82E"/>
           </a:solidFill>
           <a:ln>
             <a:noFill/>
@@ -4713,7 +7226,7 @@
         <p:spPr>
           <a:xfrm>
             <a:off x="640080" y="320040"/>
-            <a:ext cx="10881360" cy="1005840"/>
+            <a:ext cx="10881360" cy="1051560"/>
           </a:xfrm>
           <a:prstGeom prst="rect">
             <a:avLst/>
@@ -4725,20 +7238,34 @@
             <a:spAutoFit/>
           </a:bodyPr>
           <a:lstStyle/>
-          <a:p/>
           <a:p>
             <a:pPr>
               <a:spcAft>
-                <a:spcPts val="600"/>
+                <a:spcPts val="100"/>
               </a:spcAft>
-              <a:defRPr sz="3400" b="1">
-                <a:solidFill>
-                  <a:srgbClr val="1B2A4A"/>
-                </a:solidFill>
-              </a:defRPr>
-            </a:pPr>
-            <a:r>
-              <a:t>7 · Numeri del caso 6</a:t>
+              <a:defRPr sz="1300" b="1" i="0">
+                <a:solidFill>
+                  <a:srgbClr val="E8A82E"/>
+                </a:solidFill>
+              </a:defRPr>
+            </a:pPr>
+            <a:r>
+              <a:t>07 · NUMERI DEL CASO 6</a:t>
+            </a:r>
+          </a:p>
+          <a:p>
+            <a:pPr>
+              <a:spcAft>
+                <a:spcPts val="400"/>
+              </a:spcAft>
+              <a:defRPr sz="3000" b="1" i="0">
+                <a:solidFill>
+                  <a:srgbClr val="FFFFFF"/>
+                </a:solidFill>
+              </a:defRPr>
+            </a:pPr>
+            <a:r>
+              <a:t>Run Qwen 3.8, verificata sul PDF</a:t>
             </a:r>
           </a:p>
         </p:txBody>
@@ -4751,8 +7278,8 @@
         </p:nvSpPr>
         <p:spPr>
           <a:xfrm>
-            <a:off x="640080" y="1463040"/>
-            <a:ext cx="10881360" cy="5029200"/>
+            <a:off x="548640" y="6400800"/>
+            <a:ext cx="11064240" cy="274320"/>
           </a:xfrm>
           <a:prstGeom prst="rect">
             <a:avLst/>
@@ -4764,125 +7291,399 @@
             <a:spAutoFit/>
           </a:bodyPr>
           <a:lstStyle/>
-          <a:p/>
           <a:p>
             <a:pPr>
               <a:spcAft>
-                <a:spcPts val="100"/>
+                <a:spcPts val="400"/>
               </a:spcAft>
-              <a:defRPr sz="1900" b="1">
-                <a:solidFill>
-                  <a:srgbClr val="212121"/>
-                </a:solidFill>
-              </a:defRPr>
-            </a:pPr>
-            <a:r>
-              <a:t>▪  14 pagine</a:t>
-            </a:r>
-          </a:p>
+              <a:defRPr sz="1100" b="0" i="0">
+                <a:solidFill>
+                  <a:srgbClr val="5A6C7D"/>
+                </a:solidFill>
+              </a:defRPr>
+            </a:pPr>
+            <a:r>
+              <a:t>Menerva MAS  ·  Double PDF IOL+JOB  ·  caso 6 JOB.0139.23</a:t>
+            </a:r>
+          </a:p>
+        </p:txBody>
+      </p:sp>
+      <p:sp>
+        <p:nvSpPr>
+          <p:cNvPr id="5" name="TextBox 4"/>
+          <p:cNvSpPr txBox="1"/>
+          <p:nvPr/>
+        </p:nvSpPr>
+        <p:spPr>
+          <a:xfrm>
+            <a:off x="10972800" y="6400800"/>
+            <a:ext cx="640080" cy="274320"/>
+          </a:xfrm>
+          <a:prstGeom prst="rect">
+            <a:avLst/>
+          </a:prstGeom>
+          <a:noFill/>
+        </p:spPr>
+        <p:txBody>
+          <a:bodyPr wrap="none">
+            <a:spAutoFit/>
+          </a:bodyPr>
+          <a:lstStyle/>
+          <a:p>
+            <a:pPr algn="r">
+              <a:spcAft>
+                <a:spcPts val="400"/>
+              </a:spcAft>
+              <a:defRPr sz="1100" b="0" i="0">
+                <a:solidFill>
+                  <a:srgbClr val="5A6C7D"/>
+                </a:solidFill>
+              </a:defRPr>
+            </a:pPr>
+            <a:r>
+              <a:t>8/10</a:t>
+            </a:r>
+          </a:p>
+        </p:txBody>
+      </p:sp>
+      <p:sp>
+        <p:nvSpPr>
+          <p:cNvPr id="6" name="Rounded Rectangle 5"/>
+          <p:cNvSpPr/>
+          <p:nvPr/>
+        </p:nvSpPr>
+        <p:spPr>
+          <a:xfrm>
+            <a:off x="640080" y="1737360"/>
+            <a:ext cx="2514600" cy="1737360"/>
+          </a:xfrm>
+          <a:prstGeom prst="roundRect">
+            <a:avLst/>
+          </a:prstGeom>
+          <a:solidFill>
+            <a:srgbClr val="FFFFFF"/>
+          </a:solidFill>
+          <a:ln w="25400">
+            <a:solidFill>
+              <a:srgbClr val="2E86AB"/>
+            </a:solidFill>
+          </a:ln>
+        </p:spPr>
+        <p:style>
+          <a:lnRef idx="1">
+            <a:schemeClr val="accent1"/>
+          </a:lnRef>
+          <a:fillRef idx="3">
+            <a:schemeClr val="accent1"/>
+          </a:fillRef>
+          <a:effectRef idx="2">
+            <a:schemeClr val="accent1"/>
+          </a:effectRef>
+          <a:fontRef idx="minor">
+            <a:schemeClr val="lt1"/>
+          </a:fontRef>
+        </p:style>
+        <p:txBody>
+          <a:bodyPr rtlCol="0" anchor="ctr" wrap="square"/>
+          <a:lstStyle/>
+          <a:p>
+            <a:pPr algn="ctr">
+              <a:spcAft>
+                <a:spcPts val="200"/>
+              </a:spcAft>
+              <a:defRPr sz="3400" b="1" i="0">
+                <a:solidFill>
+                  <a:srgbClr val="142B4D"/>
+                </a:solidFill>
+              </a:defRPr>
+            </a:pPr>
+            <a:r>
+              <a:t>14</a:t>
+            </a:r>
+          </a:p>
+          <a:p>
+            <a:pPr algn="ctr">
+              <a:spcAft>
+                <a:spcPts val="400"/>
+              </a:spcAft>
+              <a:defRPr sz="1400" b="0" i="0">
+                <a:solidFill>
+                  <a:srgbClr val="5A6C7D"/>
+                </a:solidFill>
+              </a:defRPr>
+            </a:pPr>
+            <a:r>
+              <a:t>pagine uniche</a:t>
+            </a:r>
+            <a:br/>
+            <a:r>
+              <a:t>6 + 7 + 1</a:t>
+            </a:r>
+          </a:p>
+        </p:txBody>
+      </p:sp>
+      <p:sp>
+        <p:nvSpPr>
+          <p:cNvPr id="7" name="Rounded Rectangle 6"/>
+          <p:cNvSpPr/>
+          <p:nvPr/>
+        </p:nvSpPr>
+        <p:spPr>
+          <a:xfrm>
+            <a:off x="3429000" y="1737360"/>
+            <a:ext cx="2514600" cy="1737360"/>
+          </a:xfrm>
+          <a:prstGeom prst="roundRect">
+            <a:avLst/>
+          </a:prstGeom>
+          <a:solidFill>
+            <a:srgbClr val="FFFFFF"/>
+          </a:solidFill>
+          <a:ln w="25400">
+            <a:solidFill>
+              <a:srgbClr val="2E86AB"/>
+            </a:solidFill>
+          </a:ln>
+        </p:spPr>
+        <p:style>
+          <a:lnRef idx="1">
+            <a:schemeClr val="accent1"/>
+          </a:lnRef>
+          <a:fillRef idx="3">
+            <a:schemeClr val="accent1"/>
+          </a:fillRef>
+          <a:effectRef idx="2">
+            <a:schemeClr val="accent1"/>
+          </a:effectRef>
+          <a:fontRef idx="minor">
+            <a:schemeClr val="lt1"/>
+          </a:fontRef>
+        </p:style>
+        <p:txBody>
+          <a:bodyPr rtlCol="0" anchor="ctr" wrap="square"/>
+          <a:lstStyle/>
+          <a:p>
+            <a:pPr algn="ctr">
+              <a:spcAft>
+                <a:spcPts val="200"/>
+              </a:spcAft>
+              <a:defRPr sz="3400" b="1" i="0">
+                <a:solidFill>
+                  <a:srgbClr val="142B4D"/>
+                </a:solidFill>
+              </a:defRPr>
+            </a:pPr>
+            <a:r>
+              <a:t>69</a:t>
+            </a:r>
+          </a:p>
+          <a:p>
+            <a:pPr algn="ctr">
+              <a:spcAft>
+                <a:spcPts val="400"/>
+              </a:spcAft>
+              <a:defRPr sz="1400" b="0" i="0">
+                <a:solidFill>
+                  <a:srgbClr val="5A6C7D"/>
+                </a:solidFill>
+              </a:defRPr>
+            </a:pPr>
+            <a:r>
+              <a:t>variabili</a:t>
+            </a:r>
+            <a:br/>
+            <a:r>
+              <a:t>consolidate</a:t>
+            </a:r>
+          </a:p>
+        </p:txBody>
+      </p:sp>
+      <p:sp>
+        <p:nvSpPr>
+          <p:cNvPr id="8" name="Rounded Rectangle 7"/>
+          <p:cNvSpPr/>
+          <p:nvPr/>
+        </p:nvSpPr>
+        <p:spPr>
+          <a:xfrm>
+            <a:off x="6217920" y="1737360"/>
+            <a:ext cx="2514600" cy="1737360"/>
+          </a:xfrm>
+          <a:prstGeom prst="roundRect">
+            <a:avLst/>
+          </a:prstGeom>
+          <a:solidFill>
+            <a:srgbClr val="FFFFFF"/>
+          </a:solidFill>
+          <a:ln w="25400">
+            <a:solidFill>
+              <a:srgbClr val="2E86AB"/>
+            </a:solidFill>
+          </a:ln>
+        </p:spPr>
+        <p:style>
+          <a:lnRef idx="1">
+            <a:schemeClr val="accent1"/>
+          </a:lnRef>
+          <a:fillRef idx="3">
+            <a:schemeClr val="accent1"/>
+          </a:fillRef>
+          <a:effectRef idx="2">
+            <a:schemeClr val="accent1"/>
+          </a:effectRef>
+          <a:fontRef idx="minor">
+            <a:schemeClr val="lt1"/>
+          </a:fontRef>
+        </p:style>
+        <p:txBody>
+          <a:bodyPr rtlCol="0" anchor="ctr" wrap="square"/>
+          <a:lstStyle/>
+          <a:p>
+            <a:pPr algn="ctr">
+              <a:spcAft>
+                <a:spcPts val="200"/>
+              </a:spcAft>
+              <a:defRPr sz="3400" b="1" i="0">
+                <a:solidFill>
+                  <a:srgbClr val="142B4D"/>
+                </a:solidFill>
+              </a:defRPr>
+            </a:pPr>
+            <a:r>
+              <a:t>22 + 60</a:t>
+            </a:r>
+          </a:p>
+          <a:p>
+            <a:pPr algn="ctr">
+              <a:spcAft>
+                <a:spcPts val="400"/>
+              </a:spcAft>
+              <a:defRPr sz="1400" b="0" i="0">
+                <a:solidFill>
+                  <a:srgbClr val="5A6C7D"/>
+                </a:solidFill>
+              </a:defRPr>
+            </a:pPr>
+            <a:r>
+              <a:t>misure + bitinfo</a:t>
+            </a:r>
+            <a:br/>
+            <a:r>
+              <a:t>ADAS finale</a:t>
+            </a:r>
+          </a:p>
+        </p:txBody>
+      </p:sp>
+      <p:sp>
+        <p:nvSpPr>
+          <p:cNvPr id="9" name="Rounded Rectangle 8"/>
+          <p:cNvSpPr/>
+          <p:nvPr/>
+        </p:nvSpPr>
+        <p:spPr>
+          <a:xfrm>
+            <a:off x="9006839" y="1737360"/>
+            <a:ext cx="2514600" cy="1737360"/>
+          </a:xfrm>
+          <a:prstGeom prst="roundRect">
+            <a:avLst/>
+          </a:prstGeom>
+          <a:solidFill>
+            <a:srgbClr val="FFFFFF"/>
+          </a:solidFill>
+          <a:ln w="25400">
+            <a:solidFill>
+              <a:srgbClr val="2E86AB"/>
+            </a:solidFill>
+          </a:ln>
+        </p:spPr>
+        <p:style>
+          <a:lnRef idx="1">
+            <a:schemeClr val="accent1"/>
+          </a:lnRef>
+          <a:fillRef idx="3">
+            <a:schemeClr val="accent1"/>
+          </a:fillRef>
+          <a:effectRef idx="2">
+            <a:schemeClr val="accent1"/>
+          </a:effectRef>
+          <a:fontRef idx="minor">
+            <a:schemeClr val="lt1"/>
+          </a:fontRef>
+        </p:style>
+        <p:txBody>
+          <a:bodyPr rtlCol="0" anchor="ctr" wrap="square"/>
+          <a:lstStyle/>
+          <a:p>
+            <a:pPr algn="ctr">
+              <a:spcAft>
+                <a:spcPts val="200"/>
+              </a:spcAft>
+              <a:defRPr sz="3400" b="1" i="0">
+                <a:solidFill>
+                  <a:srgbClr val="142B4D"/>
+                </a:solidFill>
+              </a:defRPr>
+            </a:pPr>
+            <a:r>
+              <a:t>0</a:t>
+            </a:r>
+          </a:p>
+          <a:p>
+            <a:pPr algn="ctr">
+              <a:spcAft>
+                <a:spcPts val="400"/>
+              </a:spcAft>
+              <a:defRPr sz="1400" b="0" i="0">
+                <a:solidFill>
+                  <a:srgbClr val="5A6C7D"/>
+                </a:solidFill>
+              </a:defRPr>
+            </a:pPr>
+            <a:r>
+              <a:t>default silenziosi</a:t>
+            </a:r>
+            <a:br/>
+            <a:r>
+              <a:t>tutto in review</a:t>
+            </a:r>
+          </a:p>
+        </p:txBody>
+      </p:sp>
+      <p:sp>
+        <p:nvSpPr>
+          <p:cNvPr id="10" name="TextBox 9"/>
+          <p:cNvSpPr txBox="1"/>
+          <p:nvPr/>
+        </p:nvSpPr>
+        <p:spPr>
+          <a:xfrm>
+            <a:off x="640080" y="3840480"/>
+            <a:ext cx="10881360" cy="2194560"/>
+          </a:xfrm>
+          <a:prstGeom prst="rect">
+            <a:avLst/>
+          </a:prstGeom>
+          <a:noFill/>
+        </p:spPr>
+        <p:txBody>
+          <a:bodyPr wrap="square">
+            <a:spAutoFit/>
+          </a:bodyPr>
+          <a:lstStyle/>
           <a:p>
             <a:pPr>
               <a:spcAft>
-                <a:spcPts val="1000"/>
+                <a:spcPts val="400"/>
               </a:spcAft>
-              <a:defRPr sz="1600" b="0">
-                <a:solidFill>
-                  <a:srgbClr val="444444"/>
-                </a:solidFill>
-              </a:defRPr>
-            </a:pPr>
-            <a:r>
-              <a:t>     6 Station + 7 Measurement + 1 Density, chiavi conservate.</a:t>
-            </a:r>
-          </a:p>
-          <a:p>
-            <a:pPr>
-              <a:spcAft>
-                <a:spcPts val="100"/>
-              </a:spcAft>
-              <a:defRPr sz="1900" b="1">
-                <a:solidFill>
-                  <a:srgbClr val="212121"/>
-                </a:solidFill>
-              </a:defRPr>
-            </a:pPr>
-            <a:r>
-              <a:t>▪  69 variabili</a:t>
-            </a:r>
-          </a:p>
-          <a:p>
-            <a:pPr>
-              <a:spcAft>
-                <a:spcPts val="1000"/>
-              </a:spcAft>
-              <a:defRPr sz="1600" b="0">
-                <a:solidFill>
-                  <a:srgbClr val="444444"/>
-                </a:solidFill>
-              </a:defRPr>
-            </a:pPr>
-            <a:r>
-              <a:t>     65 leggero / 69 Qwen 3.8; pagina 2 completa 30/30, pagina 4 pulita.</a:t>
-            </a:r>
-          </a:p>
-          <a:p>
-            <a:pPr>
-              <a:spcAft>
-                <a:spcPts val="100"/>
-              </a:spcAft>
-              <a:defRPr sz="1900" b="1">
-                <a:solidFill>
-                  <a:srgbClr val="212121"/>
-                </a:solidFill>
-              </a:defRPr>
-            </a:pPr>
-            <a:r>
-              <a:t>▪  ADAS finale</a:t>
-            </a:r>
-          </a:p>
-          <a:p>
-            <a:pPr>
-              <a:spcAft>
-                <a:spcPts val="1000"/>
-              </a:spcAft>
-              <a:defRPr sz="1600" b="0">
-                <a:solidFill>
-                  <a:srgbClr val="444444"/>
-                </a:solidFill>
-              </a:defRPr>
-            </a:pPr>
-            <a:r>
-              <a:t>     22 misure (5 packed + 9 analogiche + 8 singoli) + 60 bitinfo, Pydantic valido.</a:t>
-            </a:r>
-          </a:p>
-          <a:p>
-            <a:pPr>
-              <a:spcAft>
-                <a:spcPts val="100"/>
-              </a:spcAft>
-              <a:defRPr sz="1900" b="1">
-                <a:solidFill>
-                  <a:srgbClr val="212121"/>
-                </a:solidFill>
-              </a:defRPr>
-            </a:pPr>
-            <a:r>
-              <a:t>▪  Confronto legacy</a:t>
-            </a:r>
-          </a:p>
-          <a:p>
-            <a:pPr>
-              <a:spcAft>
-                <a:spcPts val="1000"/>
-              </a:spcAft>
-              <a:defRPr sz="1600" b="0">
-                <a:solidFill>
-                  <a:srgbClr val="444444"/>
-                </a:solidFill>
-              </a:defRPr>
-            </a:pPr>
-            <a:r>
-              <a:t>     22=22 misure; i 12 bitinfo «mancanti» sono fantasmi del GT su righe bianche.</a:t>
+              <a:defRPr sz="1500" b="0" i="0">
+                <a:solidFill>
+                  <a:srgbClr val="5A6C7D"/>
+                </a:solidFill>
+              </a:defRPr>
+            </a:pPr>
+            <a:r>
+              <a:t>Verifiche sul PDF: pagina 2 completa 30/30 · pagina 3 con PM-310A=4 da colonna · pagina 4 pulita · riserve 420–424 saltate · ventilatori REG 6 · Pydantic valido.</a:t>
             </a:r>
           </a:p>
         </p:txBody>
@@ -4922,7 +7723,7 @@
         <p:spPr>
           <a:xfrm>
             <a:off x="0" y="0"/>
-            <a:ext cx="12191695" cy="109728"/>
+            <a:ext cx="12191695" cy="91440"/>
           </a:xfrm>
           <a:prstGeom prst="rect">
             <a:avLst/>
@@ -4951,7 +7752,7 @@
         <p:spPr>
           <a:xfrm>
             <a:off x="640080" y="320040"/>
-            <a:ext cx="10881360" cy="1005840"/>
+            <a:ext cx="10881360" cy="1051560"/>
           </a:xfrm>
           <a:prstGeom prst="rect">
             <a:avLst/>
@@ -4963,20 +7764,34 @@
             <a:spAutoFit/>
           </a:bodyPr>
           <a:lstStyle/>
-          <a:p/>
           <a:p>
             <a:pPr>
               <a:spcAft>
-                <a:spcPts val="600"/>
+                <a:spcPts val="100"/>
               </a:spcAft>
-              <a:defRPr sz="3400" b="1">
-                <a:solidFill>
-                  <a:srgbClr val="1B2A4A"/>
-                </a:solidFill>
-              </a:defRPr>
-            </a:pPr>
-            <a:r>
-              <a:t>8 · Glossario e prossimi passi</a:t>
+              <a:defRPr sz="1300" b="1" i="0">
+                <a:solidFill>
+                  <a:srgbClr val="2E86AB"/>
+                </a:solidFill>
+              </a:defRPr>
+            </a:pPr>
+            <a:r>
+              <a:t>08 · LEGACY VS NUOVO</a:t>
+            </a:r>
+          </a:p>
+          <a:p>
+            <a:pPr>
+              <a:spcAft>
+                <a:spcPts val="400"/>
+              </a:spcAft>
+              <a:defRPr sz="3000" b="1" i="0">
+                <a:solidFill>
+                  <a:srgbClr val="142B4D"/>
+                </a:solidFill>
+              </a:defRPr>
+            </a:pPr>
+            <a:r>
+              <a:t>Dove abbiamo superato il vecchio sistema</a:t>
             </a:r>
           </a:p>
         </p:txBody>
@@ -4989,8 +7804,8 @@
         </p:nvSpPr>
         <p:spPr>
           <a:xfrm>
-            <a:off x="640080" y="1463040"/>
-            <a:ext cx="10881360" cy="5029200"/>
+            <a:off x="548640" y="6400800"/>
+            <a:ext cx="11064240" cy="274320"/>
           </a:xfrm>
           <a:prstGeom prst="rect">
             <a:avLst/>
@@ -5002,99 +7817,585 @@
             <a:spAutoFit/>
           </a:bodyPr>
           <a:lstStyle/>
-          <a:p/>
           <a:p>
             <a:pPr>
               <a:spcAft>
-                <a:spcPts val="100"/>
+                <a:spcPts val="400"/>
               </a:spcAft>
-              <a:defRPr sz="1900" b="1">
-                <a:solidFill>
-                  <a:srgbClr val="212121"/>
-                </a:solidFill>
-              </a:defRPr>
-            </a:pPr>
-            <a:r>
-              <a:t>▪  Edge #N</a:t>
-            </a:r>
-          </a:p>
-          <a:p>
-            <a:pPr>
+              <a:defRPr sz="1100" b="0" i="0">
+                <a:solidFill>
+                  <a:srgbClr val="5A6C7D"/>
+                </a:solidFill>
+              </a:defRPr>
+            </a:pPr>
+            <a:r>
+              <a:t>Menerva MAS  ·  Double PDF IOL+JOB  ·  caso 6 JOB.0139.23</a:t>
+            </a:r>
+          </a:p>
+        </p:txBody>
+      </p:sp>
+      <p:sp>
+        <p:nvSpPr>
+          <p:cNvPr id="5" name="TextBox 4"/>
+          <p:cNvSpPr txBox="1"/>
+          <p:nvPr/>
+        </p:nvSpPr>
+        <p:spPr>
+          <a:xfrm>
+            <a:off x="10972800" y="6400800"/>
+            <a:ext cx="640080" cy="274320"/>
+          </a:xfrm>
+          <a:prstGeom prst="rect">
+            <a:avLst/>
+          </a:prstGeom>
+          <a:noFill/>
+        </p:spPr>
+        <p:txBody>
+          <a:bodyPr wrap="none">
+            <a:spAutoFit/>
+          </a:bodyPr>
+          <a:lstStyle/>
+          <a:p>
+            <a:pPr algn="r">
               <a:spcAft>
-                <a:spcPts val="1000"/>
+                <a:spcPts val="400"/>
               </a:spcAft>
-              <a:defRPr sz="1600" b="0">
-                <a:solidFill>
-                  <a:srgbClr val="444444"/>
-                </a:solidFill>
-              </a:defRPr>
-            </a:pPr>
-            <a:r>
-              <a:t>     Filo tra nodi, numero locale al canvas: ricontrollare dopo ogni ricablaggio.</a:t>
-            </a:r>
-          </a:p>
-          <a:p>
-            <a:pPr>
-              <a:spcAft>
-                <a:spcPts val="100"/>
-              </a:spcAft>
-              <a:defRPr sz="1900" b="1">
-                <a:solidFill>
-                  <a:srgbClr val="212121"/>
-                </a:solidFill>
-              </a:defRPr>
-            </a:pPr>
-            <a:r>
-              <a:t>▪  {question} / {edge}[N]</a:t>
-            </a:r>
-          </a:p>
-          <a:p>
-            <a:pPr>
-              <a:spcAft>
-                <a:spcPts val="1000"/>
-              </a:spcAft>
-              <a:defRPr sz="1600" b="0">
-                <a:solidFill>
-                  <a:srgbClr val="444444"/>
-                </a:solidFill>
-              </a:defRPr>
-            </a:pPr>
-            <a:r>
-              <a:t>     Record pagina dell'iterazione / output di un altro nodo.</a:t>
-            </a:r>
-          </a:p>
-          <a:p>
-            <a:pPr>
-              <a:spcAft>
-                <a:spcPts val="100"/>
-              </a:spcAft>
-              <a:defRPr sz="1900" b="1">
-                <a:solidFill>
-                  <a:srgbClr val="212121"/>
-                </a:solidFill>
-              </a:defRPr>
-            </a:pPr>
-            <a:r>
-              <a:t>▪  Aperti</a:t>
-            </a:r>
-          </a:p>
-          <a:p>
-            <a:pPr>
-              <a:spcAft>
-                <a:spcPts val="1000"/>
-              </a:spcAft>
-              <a:defRPr sz="1600" b="0">
-                <a:solidFill>
-                  <a:srgbClr val="444444"/>
-                </a:solidFill>
-              </a:defRPr>
-            </a:pPr>
-            <a:r>
-              <a:t>     Scala TF, limiti JOB, TEXTON parziali REG 3, BISON dal cliente.</a:t>
-            </a:r>
-          </a:p>
-        </p:txBody>
-      </p:sp>
+              <a:defRPr sz="1100" b="0" i="0">
+                <a:solidFill>
+                  <a:srgbClr val="5A6C7D"/>
+                </a:solidFill>
+              </a:defRPr>
+            </a:pPr>
+            <a:r>
+              <a:t>9/10</a:t>
+            </a:r>
+          </a:p>
+        </p:txBody>
+      </p:sp>
+      <p:graphicFrame>
+        <p:nvGraphicFramePr>
+          <p:cNvPr id="6" name="Table 5"/>
+          <p:cNvGraphicFramePr>
+            <a:graphicFrameLocks noGrp="1"/>
+          </p:cNvGraphicFramePr>
+          <p:nvPr/>
+        </p:nvGraphicFramePr>
+        <p:xfrm>
+          <a:off x="640080" y="1554480"/>
+          <a:ext cx="10881360" cy="3200400"/>
+        </p:xfrm>
+        <a:graphic>
+          <a:graphicData uri="http://schemas.openxmlformats.org/drawingml/2006/table">
+            <a:tbl>
+              <a:tblPr firstRow="1" bandRow="1">
+                <a:tableStyleId>{5C22544A-7EE6-4342-B048-85BDC9FD1C3A}</a:tableStyleId>
+              </a:tblPr>
+              <a:tblGrid>
+                <a:gridCol w="2377440"/>
+                <a:gridCol w="4023360"/>
+                <a:gridCol w="4480560"/>
+              </a:tblGrid>
+              <a:tr h="457200">
+                <a:tc>
+                  <a:txBody>
+                    <a:bodyPr wrap="square"/>
+                    <a:lstStyle/>
+                    <a:p>
+                      <a:pPr>
+                        <a:defRPr sz="1400" b="1">
+                          <a:solidFill>
+                            <a:srgbClr val="FFFFFF"/>
+                          </a:solidFill>
+                        </a:defRPr>
+                      </a:pPr>
+                      <a:r>
+                        <a:t>Aspetto</a:t>
+                      </a:r>
+                    </a:p>
+                  </a:txBody>
+                  <a:tcPr anchor="ctr">
+                    <a:solidFill>
+                      <a:srgbClr val="142B4D"/>
+                    </a:solidFill>
+                  </a:tcPr>
+                </a:tc>
+                <a:tc>
+                  <a:txBody>
+                    <a:bodyPr wrap="square"/>
+                    <a:lstStyle/>
+                    <a:p>
+                      <a:pPr>
+                        <a:defRPr sz="1400" b="1">
+                          <a:solidFill>
+                            <a:srgbClr val="FFFFFF"/>
+                          </a:solidFill>
+                        </a:defRPr>
+                      </a:pPr>
+                      <a:r>
+                        <a:t>Legacy</a:t>
+                      </a:r>
+                    </a:p>
+                  </a:txBody>
+                  <a:tcPr anchor="ctr">
+                    <a:solidFill>
+                      <a:srgbClr val="142B4D"/>
+                    </a:solidFill>
+                  </a:tcPr>
+                </a:tc>
+                <a:tc>
+                  <a:txBody>
+                    <a:bodyPr wrap="square"/>
+                    <a:lstStyle/>
+                    <a:p>
+                      <a:pPr>
+                        <a:defRPr sz="1400" b="1">
+                          <a:solidFill>
+                            <a:srgbClr val="FFFFFF"/>
+                          </a:solidFill>
+                        </a:defRPr>
+                      </a:pPr>
+                      <a:r>
+                        <a:t>Nuovo (verificato)</a:t>
+                      </a:r>
+                    </a:p>
+                  </a:txBody>
+                  <a:tcPr anchor="ctr">
+                    <a:solidFill>
+                      <a:srgbClr val="142B4D"/>
+                    </a:solidFill>
+                  </a:tcPr>
+                </a:tc>
+              </a:tr>
+              <a:tr h="457200">
+                <a:tc>
+                  <a:txBody>
+                    <a:bodyPr wrap="square"/>
+                    <a:lstStyle/>
+                    <a:p>
+                      <a:pPr>
+                        <a:defRPr sz="1300" b="0">
+                          <a:solidFill>
+                            <a:srgbClr val="232323"/>
+                          </a:solidFill>
+                        </a:defRPr>
+                      </a:pPr>
+                      <a:r>
+                        <a:t>Ruolo documento</a:t>
+                      </a:r>
+                    </a:p>
+                  </a:txBody>
+                  <a:tcPr anchor="ctr">
+                    <a:solidFill>
+                      <a:srgbClr val="ECF2F7"/>
+                    </a:solidFill>
+                  </a:tcPr>
+                </a:tc>
+                <a:tc>
+                  <a:txBody>
+                    <a:bodyPr wrap="square"/>
+                    <a:lstStyle/>
+                    <a:p>
+                      <a:pPr>
+                        <a:defRPr sz="1300" b="0">
+                          <a:solidFill>
+                            <a:srgbClr val="232323"/>
+                          </a:solidFill>
+                        </a:defRPr>
+                      </a:pPr>
+                      <a:r>
+                        <a:t>Solo categorie pagina</a:t>
+                      </a:r>
+                    </a:p>
+                  </a:txBody>
+                  <a:tcPr anchor="ctr">
+                    <a:solidFill>
+                      <a:srgbClr val="ECF2F7"/>
+                    </a:solidFill>
+                  </a:tcPr>
+                </a:tc>
+                <a:tc>
+                  <a:txBody>
+                    <a:bodyPr wrap="square"/>
+                    <a:lstStyle/>
+                    <a:p>
+                      <a:pPr>
+                        <a:defRPr sz="1300" b="0">
+                          <a:solidFill>
+                            <a:srgbClr val="232323"/>
+                          </a:solidFill>
+                        </a:defRPr>
+                      </a:pPr>
+                      <a:r>
+                        <a:t>IOL/JOB da evidenze visive</a:t>
+                      </a:r>
+                    </a:p>
+                  </a:txBody>
+                  <a:tcPr anchor="ctr">
+                    <a:solidFill>
+                      <a:srgbClr val="ECF2F7"/>
+                    </a:solidFill>
+                  </a:tcPr>
+                </a:tc>
+              </a:tr>
+              <a:tr h="457200">
+                <a:tc>
+                  <a:txBody>
+                    <a:bodyPr wrap="square"/>
+                    <a:lstStyle/>
+                    <a:p>
+                      <a:pPr>
+                        <a:defRPr sz="1300" b="0">
+                          <a:solidFill>
+                            <a:srgbClr val="232323"/>
+                          </a:solidFill>
+                        </a:defRPr>
+                      </a:pPr>
+                      <a:r>
+                        <a:t>Pagine ripetute</a:t>
+                      </a:r>
+                    </a:p>
+                  </a:txBody>
+                  <a:tcPr anchor="ctr">
+                    <a:solidFill>
+                      <a:srgbClr val="FFFFFF"/>
+                    </a:solidFill>
+                  </a:tcPr>
+                </a:tc>
+                <a:tc>
+                  <a:txBody>
+                    <a:bodyPr wrap="square"/>
+                    <a:lstStyle/>
+                    <a:p>
+                      <a:pPr>
+                        <a:defRPr sz="1300" b="0">
+                          <a:solidFill>
+                            <a:srgbClr val="232323"/>
+                          </a:solidFill>
+                        </a:defRPr>
+                      </a:pPr>
+                      <a:r>
+                        <a:t>Senza dedup generale</a:t>
+                      </a:r>
+                    </a:p>
+                  </a:txBody>
+                  <a:tcPr anchor="ctr">
+                    <a:solidFill>
+                      <a:srgbClr val="FFFFFF"/>
+                    </a:solidFill>
+                  </a:tcPr>
+                </a:tc>
+                <a:tc>
+                  <a:txBody>
+                    <a:bodyPr wrap="square"/>
+                    <a:lstStyle/>
+                    <a:p>
+                      <a:pPr>
+                        <a:defRPr sz="1300" b="0">
+                          <a:solidFill>
+                            <a:srgbClr val="232323"/>
+                          </a:solidFill>
+                        </a:defRPr>
+                      </a:pPr>
+                      <a:r>
+                        <a:t>14 uniche su 27, avvisi inclusi</a:t>
+                      </a:r>
+                    </a:p>
+                  </a:txBody>
+                  <a:tcPr anchor="ctr">
+                    <a:solidFill>
+                      <a:srgbClr val="FFFFFF"/>
+                    </a:solidFill>
+                  </a:tcPr>
+                </a:tc>
+              </a:tr>
+              <a:tr h="457200">
+                <a:tc>
+                  <a:txBody>
+                    <a:bodyPr wrap="square"/>
+                    <a:lstStyle/>
+                    <a:p>
+                      <a:pPr>
+                        <a:defRPr sz="1300" b="0">
+                          <a:solidFill>
+                            <a:srgbClr val="232323"/>
+                          </a:solidFill>
+                        </a:defRPr>
+                      </a:pPr>
+                      <a:r>
+                        <a:t>Routing</a:t>
+                      </a:r>
+                    </a:p>
+                  </a:txBody>
+                  <a:tcPr anchor="ctr">
+                    <a:solidFill>
+                      <a:srgbClr val="ECF2F7"/>
+                    </a:solidFill>
+                  </a:tcPr>
+                </a:tc>
+                <a:tc>
+                  <a:txBody>
+                    <a:bodyPr wrap="square"/>
+                    <a:lstStyle/>
+                    <a:p>
+                      <a:pPr>
+                        <a:defRPr sz="1300" b="0">
+                          <a:solidFill>
+                            <a:srgbClr val="232323"/>
+                          </a:solidFill>
+                        </a:defRPr>
+                      </a:pPr>
+                      <a:r>
+                        <a:t>Rami su stringa (rotti)</a:t>
+                      </a:r>
+                    </a:p>
+                  </a:txBody>
+                  <a:tcPr anchor="ctr">
+                    <a:solidFill>
+                      <a:srgbClr val="ECF2F7"/>
+                    </a:solidFill>
+                  </a:tcPr>
+                </a:tc>
+                <a:tc>
+                  <a:txBody>
+                    <a:bodyPr wrap="square"/>
+                    <a:lstStyle/>
+                    <a:p>
+                      <a:pPr>
+                        <a:defRPr sz="1300" b="0">
+                          <a:solidFill>
+                            <a:srgbClr val="232323"/>
+                          </a:solidFill>
+                        </a:defRPr>
+                      </a:pPr>
+                      <a:r>
+                        <a:t>3 filtri per label</a:t>
+                      </a:r>
+                    </a:p>
+                  </a:txBody>
+                  <a:tcPr anchor="ctr">
+                    <a:solidFill>
+                      <a:srgbClr val="ECF2F7"/>
+                    </a:solidFill>
+                  </a:tcPr>
+                </a:tc>
+              </a:tr>
+              <a:tr h="457200">
+                <a:tc>
+                  <a:txBody>
+                    <a:bodyPr wrap="square"/>
+                    <a:lstStyle/>
+                    <a:p>
+                      <a:pPr>
+                        <a:defRPr sz="1300" b="0">
+                          <a:solidFill>
+                            <a:srgbClr val="232323"/>
+                          </a:solidFill>
+                        </a:defRPr>
+                      </a:pPr>
+                      <a:r>
+                        <a:t>Merge</a:t>
+                      </a:r>
+                    </a:p>
+                  </a:txBody>
+                  <a:tcPr anchor="ctr">
+                    <a:solidFill>
+                      <a:srgbClr val="FFFFFF"/>
+                    </a:solidFill>
+                  </a:tcPr>
+                </a:tc>
+                <a:tc>
+                  <a:txBody>
+                    <a:bodyPr wrap="square"/>
+                    <a:lstStyle/>
+                    <a:p>
+                      <a:pPr>
+                        <a:defRPr sz="1300" b="0">
+                          <a:solidFill>
+                            <a:srgbClr val="232323"/>
+                          </a:solidFill>
+                        </a:defRPr>
+                      </a:pPr>
+                      <a:r>
+                        <a:t>6 nodi, ID fragili</a:t>
+                      </a:r>
+                    </a:p>
+                  </a:txBody>
+                  <a:tcPr anchor="ctr">
+                    <a:solidFill>
+                      <a:srgbClr val="FFFFFF"/>
+                    </a:solidFill>
+                  </a:tcPr>
+                </a:tc>
+                <a:tc>
+                  <a:txBody>
+                    <a:bodyPr wrap="square"/>
+                    <a:lstStyle/>
+                    <a:p>
+                      <a:pPr>
+                        <a:defRPr sz="1300" b="0">
+                          <a:solidFill>
+                            <a:srgbClr val="232323"/>
+                          </a:solidFill>
+                        </a:defRPr>
+                      </a:pPr>
+                      <a:r>
+                        <a:t>1 assemblatore + review</a:t>
+                      </a:r>
+                    </a:p>
+                  </a:txBody>
+                  <a:tcPr anchor="ctr">
+                    <a:solidFill>
+                      <a:srgbClr val="FFFFFF"/>
+                    </a:solidFill>
+                  </a:tcPr>
+                </a:tc>
+              </a:tr>
+              <a:tr h="457200">
+                <a:tc>
+                  <a:txBody>
+                    <a:bodyPr wrap="square"/>
+                    <a:lstStyle/>
+                    <a:p>
+                      <a:pPr>
+                        <a:defRPr sz="1300" b="0">
+                          <a:solidFill>
+                            <a:srgbClr val="232323"/>
+                          </a:solidFill>
+                        </a:defRPr>
+                      </a:pPr>
+                      <a:r>
+                        <a:t>Errori</a:t>
+                      </a:r>
+                    </a:p>
+                  </a:txBody>
+                  <a:tcPr anchor="ctr">
+                    <a:solidFill>
+                      <a:srgbClr val="ECF2F7"/>
+                    </a:solidFill>
+                  </a:tcPr>
+                </a:tc>
+                <a:tc>
+                  <a:txBody>
+                    <a:bodyPr wrap="square"/>
+                    <a:lstStyle/>
+                    <a:p>
+                      <a:pPr>
+                        <a:defRPr sz="1300" b="0">
+                          <a:solidFill>
+                            <a:srgbClr val="232323"/>
+                          </a:solidFill>
+                        </a:defRPr>
+                      </a:pPr>
+                      <a:r>
+                        <a:t>Default silenziosi</a:t>
+                      </a:r>
+                    </a:p>
+                  </a:txBody>
+                  <a:tcPr anchor="ctr">
+                    <a:solidFill>
+                      <a:srgbClr val="ECF2F7"/>
+                    </a:solidFill>
+                  </a:tcPr>
+                </a:tc>
+                <a:tc>
+                  <a:txBody>
+                    <a:bodyPr wrap="square"/>
+                    <a:lstStyle/>
+                    <a:p>
+                      <a:pPr>
+                        <a:defRPr sz="1300" b="0">
+                          <a:solidFill>
+                            <a:srgbClr val="232323"/>
+                          </a:solidFill>
+                        </a:defRPr>
+                      </a:pPr>
+                      <a:r>
+                        <a:t>Conflitti in review, mai fusi</a:t>
+                      </a:r>
+                    </a:p>
+                  </a:txBody>
+                  <a:tcPr anchor="ctr">
+                    <a:solidFill>
+                      <a:srgbClr val="ECF2F7"/>
+                    </a:solidFill>
+                  </a:tcPr>
+                </a:tc>
+              </a:tr>
+              <a:tr h="457200">
+                <a:tc>
+                  <a:txBody>
+                    <a:bodyPr wrap="square"/>
+                    <a:lstStyle/>
+                    <a:p>
+                      <a:pPr>
+                        <a:defRPr sz="1300" b="0">
+                          <a:solidFill>
+                            <a:srgbClr val="232323"/>
+                          </a:solidFill>
+                        </a:defRPr>
+                      </a:pPr>
+                      <a:r>
+                        <a:t>Righe vuote</a:t>
+                      </a:r>
+                    </a:p>
+                  </a:txBody>
+                  <a:tcPr anchor="ctr">
+                    <a:solidFill>
+                      <a:srgbClr val="FFFFFF"/>
+                    </a:solidFill>
+                  </a:tcPr>
+                </a:tc>
+                <a:tc>
+                  <a:txBody>
+                    <a:bodyPr wrap="square"/>
+                    <a:lstStyle/>
+                    <a:p>
+                      <a:pPr>
+                        <a:defRPr sz="1300" b="0">
+                          <a:solidFill>
+                            <a:srgbClr val="232323"/>
+                          </a:solidFill>
+                        </a:defRPr>
+                      </a:pPr>
+                      <a:r>
+                        <a:t>Inventate («Comando riservato»)</a:t>
+                      </a:r>
+                    </a:p>
+                  </a:txBody>
+                  <a:tcPr anchor="ctr">
+                    <a:solidFill>
+                      <a:srgbClr val="FFFFFF"/>
+                    </a:solidFill>
+                  </a:tcPr>
+                </a:tc>
+                <a:tc>
+                  <a:txBody>
+                    <a:bodyPr wrap="square"/>
+                    <a:lstStyle/>
+                    <a:p>
+                      <a:pPr>
+                        <a:defRPr sz="1300" b="0">
+                          <a:solidFill>
+                            <a:srgbClr val="232323"/>
+                          </a:solidFill>
+                        </a:defRPr>
+                      </a:pPr>
+                      <a:r>
+                        <a:t>Saltate e conteggiate</a:t>
+                      </a:r>
+                    </a:p>
+                  </a:txBody>
+                  <a:tcPr anchor="ctr">
+                    <a:solidFill>
+                      <a:srgbClr val="FFFFFF"/>
+                    </a:solidFill>
+                  </a:tcPr>
+                </a:tc>
+              </a:tr>
+            </a:tbl>
+          </a:graphicData>
+        </a:graphic>
+      </p:graphicFrame>
     </p:spTree>
   </p:cSld>
   <p:clrMapOvr>
